--- a/assets/Portfoilo/리얼 포폴 수정 (1).pptx
+++ b/assets/Portfoilo/리얼 포폴 수정 (1).pptx
@@ -5,7 +5,7 @@
     <p:sldMasterId id="2147483648" r:id="rId1"/>
   </p:sldMasterIdLst>
   <p:notesMasterIdLst>
-    <p:notesMasterId r:id="rId17"/>
+    <p:notesMasterId r:id="rId16"/>
   </p:notesMasterIdLst>
   <p:sldIdLst>
     <p:sldId id="256" r:id="rId2"/>
@@ -20,9 +20,8 @@
     <p:sldId id="274" r:id="rId11"/>
     <p:sldId id="267" r:id="rId12"/>
     <p:sldId id="268" r:id="rId13"/>
-    <p:sldId id="270" r:id="rId14"/>
-    <p:sldId id="271" r:id="rId15"/>
-    <p:sldId id="272" r:id="rId16"/>
+    <p:sldId id="271" r:id="rId14"/>
+    <p:sldId id="272" r:id="rId15"/>
   </p:sldIdLst>
   <p:sldSz cx="12192000" cy="6858000"/>
   <p:notesSz cx="12192000" cy="6858000"/>
@@ -132,7 +131,7 @@
           <a:p>
             <a:fld id="{81B15C3F-E953-4D0C-9D58-03866FB4B9A1}" type="datetimeFigureOut">
               <a:rPr lang="ko-KR" altLang="en-US" smtClean="0"/>
-              <a:t>2026-09-06</a:t>
+              <a:t>2026-10-22</a:t>
             </a:fld>
             <a:endParaRPr lang="ko-KR" altLang="en-US"/>
           </a:p>
@@ -639,7 +638,7 @@
           <a:p>
             <a:fld id="{1D8BD707-D9CF-40AE-B4C6-C98DA3205C09}" type="datetimeFigureOut">
               <a:rPr lang="en-US"/>
-              <a:t>9/6/2026</a:t>
+              <a:t>10/22/2026</a:t>
             </a:fld>
             <a:endParaRPr lang="en-US"/>
           </a:p>
@@ -1533,7 +1532,7 @@
           <a:p>
             <a:fld id="{1D8BD707-D9CF-40AE-B4C6-C98DA3205C09}" type="datetimeFigureOut">
               <a:rPr lang="en-US"/>
-              <a:t>9/6/2026</a:t>
+              <a:t>10/22/2026</a:t>
             </a:fld>
             <a:endParaRPr lang="en-US"/>
           </a:p>
@@ -1758,7 +1757,7 @@
           <a:p>
             <a:fld id="{1D8BD707-D9CF-40AE-B4C6-C98DA3205C09}" type="datetimeFigureOut">
               <a:rPr lang="en-US"/>
-              <a:t>9/6/2026</a:t>
+              <a:t>10/22/2026</a:t>
             </a:fld>
             <a:endParaRPr lang="en-US"/>
           </a:p>
@@ -1917,7 +1916,7 @@
           <a:p>
             <a:fld id="{1D8BD707-D9CF-40AE-B4C6-C98DA3205C09}" type="datetimeFigureOut">
               <a:rPr lang="en-US"/>
-              <a:t>9/6/2026</a:t>
+              <a:t>10/22/2026</a:t>
             </a:fld>
             <a:endParaRPr lang="en-US"/>
           </a:p>
@@ -2047,7 +2046,7 @@
           <a:p>
             <a:fld id="{1D8BD707-D9CF-40AE-B4C6-C98DA3205C09}" type="datetimeFigureOut">
               <a:rPr lang="en-US"/>
-              <a:t>9/6/2026</a:t>
+              <a:t>10/22/2026</a:t>
             </a:fld>
             <a:endParaRPr lang="en-US"/>
           </a:p>
@@ -2327,7 +2326,7 @@
           <a:p>
             <a:fld id="{1D8BD707-D9CF-40AE-B4C6-C98DA3205C09}" type="datetimeFigureOut">
               <a:rPr lang="en-US"/>
-              <a:t>9/6/2026</a:t>
+              <a:t>10/22/2026</a:t>
             </a:fld>
             <a:endParaRPr lang="en-US"/>
           </a:p>
@@ -11908,10 +11907,10 @@
         </p:nvGrpSpPr>
         <p:grpSpPr>
           <a:xfrm>
-            <a:off x="236474" y="96265"/>
-            <a:ext cx="11742420" cy="6109335"/>
-            <a:chOff x="236474" y="96265"/>
-            <a:chExt cx="11742420" cy="6109335"/>
+            <a:off x="249174" y="108965"/>
+            <a:ext cx="11717020" cy="6083935"/>
+            <a:chOff x="249174" y="108965"/>
+            <a:chExt cx="11717020" cy="6083935"/>
           </a:xfrm>
         </p:grpSpPr>
         <p:sp>
@@ -12074,7 +12073,7 @@
           </p:nvSpPr>
           <p:spPr>
             <a:xfrm>
-              <a:off x="351282" y="514349"/>
+              <a:off x="319758" y="514349"/>
               <a:ext cx="11490960" cy="5577840"/>
             </a:xfrm>
             <a:custGeom>
@@ -12130,7 +12129,7 @@
             <a:bodyPr wrap="square" lIns="0" tIns="0" rIns="0" bIns="0" rtlCol="0"/>
             <a:lstStyle/>
             <a:p>
-              <a:endParaRPr/>
+              <a:endParaRPr dirty="0"/>
             </a:p>
           </p:txBody>
         </p:sp>
@@ -13221,10 +13220,10 @@
         </p:nvGrpSpPr>
         <p:grpSpPr>
           <a:xfrm>
-            <a:off x="534923" y="1205738"/>
-            <a:ext cx="7196455" cy="4678680"/>
-            <a:chOff x="534923" y="1205738"/>
-            <a:chExt cx="7196455" cy="4678680"/>
+            <a:off x="534923" y="1217676"/>
+            <a:ext cx="7183755" cy="4654042"/>
+            <a:chOff x="534923" y="1217676"/>
+            <a:chExt cx="7183755" cy="4654042"/>
           </a:xfrm>
         </p:grpSpPr>
         <p:sp>
@@ -13235,7 +13234,7 @@
           </p:nvSpPr>
           <p:spPr>
             <a:xfrm>
-              <a:off x="2436113" y="2201418"/>
+              <a:off x="2436112" y="2600355"/>
               <a:ext cx="771525" cy="571500"/>
             </a:xfrm>
             <a:custGeom>
@@ -13282,7 +13281,7 @@
             <a:bodyPr wrap="square" lIns="0" tIns="0" rIns="0" bIns="0" rtlCol="0"/>
             <a:lstStyle/>
             <a:p>
-              <a:endParaRPr/>
+              <a:endParaRPr dirty="0"/>
             </a:p>
           </p:txBody>
         </p:sp>
@@ -13294,7 +13293,7 @@
           </p:nvSpPr>
           <p:spPr>
             <a:xfrm>
-              <a:off x="2436113" y="2201418"/>
+              <a:off x="2436111" y="2582398"/>
               <a:ext cx="771525" cy="571500"/>
             </a:xfrm>
             <a:custGeom>
@@ -13343,7 +13342,7 @@
             <a:bodyPr wrap="square" lIns="0" tIns="0" rIns="0" bIns="0" rtlCol="0"/>
             <a:lstStyle/>
             <a:p>
-              <a:endParaRPr/>
+              <a:endParaRPr dirty="0"/>
             </a:p>
           </p:txBody>
         </p:sp>
@@ -13777,10 +13776,10 @@
         </p:nvGrpSpPr>
         <p:grpSpPr>
           <a:xfrm>
-            <a:off x="3273552" y="1199641"/>
-            <a:ext cx="8397240" cy="4684395"/>
-            <a:chOff x="3273552" y="1199641"/>
-            <a:chExt cx="8397240" cy="4684395"/>
+            <a:off x="3272851" y="1631759"/>
+            <a:ext cx="8385080" cy="4208752"/>
+            <a:chOff x="3293172" y="1271015"/>
+            <a:chExt cx="8385080" cy="4208752"/>
           </a:xfrm>
         </p:grpSpPr>
         <p:sp>
@@ -13791,7 +13790,7 @@
           </p:nvSpPr>
           <p:spPr>
             <a:xfrm>
-              <a:off x="5292852" y="2299716"/>
+              <a:off x="5292852" y="1887441"/>
               <a:ext cx="280670" cy="341630"/>
             </a:xfrm>
             <a:custGeom>
@@ -13850,7 +13849,7 @@
           </p:nvSpPr>
           <p:spPr>
             <a:xfrm>
-              <a:off x="5292852" y="2299716"/>
+              <a:off x="5287327" y="1877535"/>
               <a:ext cx="280670" cy="341630"/>
             </a:xfrm>
             <a:custGeom>
@@ -13899,7 +13898,7 @@
             <a:bodyPr wrap="square" lIns="0" tIns="0" rIns="0" bIns="0" rtlCol="0"/>
             <a:lstStyle/>
             <a:p>
-              <a:endParaRPr/>
+              <a:endParaRPr dirty="0"/>
             </a:p>
           </p:txBody>
         </p:sp>
@@ -13917,8 +13916,8 @@
           </p:blipFill>
           <p:spPr>
             <a:xfrm>
-              <a:off x="3273552" y="3464052"/>
-              <a:ext cx="4443984" cy="1641348"/>
+              <a:off x="3293172" y="3464052"/>
+              <a:ext cx="4424364" cy="1641348"/>
             </a:xfrm>
             <a:prstGeom prst="rect">
               <a:avLst/>
@@ -14075,7 +14074,7 @@
           </p:nvSpPr>
           <p:spPr>
             <a:xfrm>
-              <a:off x="8654034" y="1719072"/>
+              <a:off x="8674067" y="1327502"/>
               <a:ext cx="3004185" cy="4152265"/>
             </a:xfrm>
             <a:custGeom>
@@ -14113,59 +14112,7 @@
             <a:bodyPr wrap="square" lIns="0" tIns="0" rIns="0" bIns="0" rtlCol="0"/>
             <a:lstStyle/>
             <a:p>
-              <a:endParaRPr/>
-            </a:p>
-          </p:txBody>
-        </p:sp>
-        <p:sp>
-          <p:nvSpPr>
-            <p:cNvPr id="47" name="object 47"/>
-            <p:cNvSpPr/>
-            <p:nvPr/>
-          </p:nvSpPr>
-          <p:spPr>
-            <a:xfrm>
-              <a:off x="8654034" y="1212341"/>
-              <a:ext cx="3004185" cy="4658995"/>
-            </a:xfrm>
-            <a:custGeom>
-              <a:avLst/>
-              <a:gdLst/>
-              <a:ahLst/>
-              <a:cxnLst/>
-              <a:rect l="l" t="t" r="r" b="b"/>
-              <a:pathLst>
-                <a:path w="3004184" h="4658995">
-                  <a:moveTo>
-                    <a:pt x="0" y="4658868"/>
-                  </a:moveTo>
-                  <a:lnTo>
-                    <a:pt x="3003804" y="4658868"/>
-                  </a:lnTo>
-                  <a:lnTo>
-                    <a:pt x="3003804" y="0"/>
-                  </a:lnTo>
-                  <a:lnTo>
-                    <a:pt x="0" y="0"/>
-                  </a:lnTo>
-                  <a:lnTo>
-                    <a:pt x="0" y="4658868"/>
-                  </a:lnTo>
-                  <a:close/>
-                </a:path>
-              </a:pathLst>
-            </a:custGeom>
-            <a:ln w="25400">
-              <a:solidFill>
-                <a:srgbClr val="FFFFFF"/>
-              </a:solidFill>
-            </a:ln>
-          </p:spPr>
-          <p:txBody>
-            <a:bodyPr wrap="square" lIns="0" tIns="0" rIns="0" bIns="0" rtlCol="0"/>
-            <a:lstStyle/>
-            <a:p>
-              <a:endParaRPr/>
+              <a:endParaRPr dirty="0"/>
             </a:p>
           </p:txBody>
         </p:sp>
@@ -14178,7 +14125,7 @@
         </p:nvSpPr>
         <p:spPr>
           <a:xfrm>
-            <a:off x="3816984" y="2775661"/>
+            <a:off x="3809364" y="3023170"/>
             <a:ext cx="3195955" cy="574675"/>
           </a:xfrm>
           <a:prstGeom prst="rect">
@@ -14262,7 +14209,7 @@
               </a:rPr>
               <a:t>및</a:t>
             </a:r>
-            <a:endParaRPr sz="1800">
+            <a:endParaRPr sz="1800" dirty="0">
               <a:latin typeface="Malgun Gothic"/>
               <a:cs typeface="Malgun Gothic"/>
             </a:endParaRPr>
@@ -14297,7 +14244,7 @@
               </a:rPr>
               <a:t>저장</a:t>
             </a:r>
-            <a:endParaRPr sz="1800">
+            <a:endParaRPr sz="1800" dirty="0">
               <a:latin typeface="Malgun Gothic"/>
               <a:cs typeface="Malgun Gothic"/>
             </a:endParaRPr>
@@ -15250,7 +15197,7 @@
         </p:nvSpPr>
         <p:spPr>
           <a:xfrm>
-            <a:off x="4152265" y="5163769"/>
+            <a:off x="4209986" y="2600355"/>
             <a:ext cx="2192020" cy="300355"/>
           </a:xfrm>
           <a:prstGeom prst="rect">
@@ -15299,7 +15246,7 @@
               </a:rPr>
               <a:t>사용하여</a:t>
             </a:r>
-            <a:endParaRPr sz="1800">
+            <a:endParaRPr sz="1800" dirty="0">
               <a:latin typeface="Malgun Gothic"/>
               <a:cs typeface="Malgun Gothic"/>
             </a:endParaRPr>
@@ -15315,5157 +15262,6 @@
 </file>
 
 <file path=ppt/slides/slide13.xml><?xml version="1.0" encoding="utf-8"?>
-<p:sld xmlns:a="http://schemas.openxmlformats.org/drawingml/2006/main" xmlns:r="http://schemas.openxmlformats.org/officeDocument/2006/relationships" xmlns:p="http://schemas.openxmlformats.org/presentationml/2006/main">
-  <p:cSld>
-    <p:spTree>
-      <p:nvGrpSpPr>
-        <p:cNvPr id="1" name=""/>
-        <p:cNvGrpSpPr/>
-        <p:nvPr/>
-      </p:nvGrpSpPr>
-      <p:grpSpPr>
-        <a:xfrm>
-          <a:off x="0" y="0"/>
-          <a:ext cx="0" cy="0"/>
-          <a:chOff x="0" y="0"/>
-          <a:chExt cx="0" cy="0"/>
-        </a:xfrm>
-      </p:grpSpPr>
-      <p:grpSp>
-        <p:nvGrpSpPr>
-          <p:cNvPr id="2" name="object 2"/>
-          <p:cNvGrpSpPr/>
-          <p:nvPr/>
-        </p:nvGrpSpPr>
-        <p:grpSpPr>
-          <a:xfrm>
-            <a:off x="123826" y="96265"/>
-            <a:ext cx="11915774" cy="6109335"/>
-            <a:chOff x="1032002" y="96265"/>
-            <a:chExt cx="10946765" cy="6109335"/>
-          </a:xfrm>
-        </p:grpSpPr>
-        <p:sp>
-          <p:nvSpPr>
-            <p:cNvPr id="3" name="object 3"/>
-            <p:cNvSpPr/>
-            <p:nvPr/>
-          </p:nvSpPr>
-          <p:spPr>
-            <a:xfrm>
-              <a:off x="1044702" y="108965"/>
-              <a:ext cx="10921365" cy="6083935"/>
-            </a:xfrm>
-            <a:custGeom>
-              <a:avLst/>
-              <a:gdLst/>
-              <a:ahLst/>
-              <a:cxnLst/>
-              <a:rect l="l" t="t" r="r" b="b"/>
-              <a:pathLst>
-                <a:path w="10921365" h="6083935">
-                  <a:moveTo>
-                    <a:pt x="10920984" y="0"/>
-                  </a:moveTo>
-                  <a:lnTo>
-                    <a:pt x="0" y="0"/>
-                  </a:lnTo>
-                  <a:lnTo>
-                    <a:pt x="0" y="6083808"/>
-                  </a:lnTo>
-                  <a:lnTo>
-                    <a:pt x="10920984" y="6083808"/>
-                  </a:lnTo>
-                  <a:lnTo>
-                    <a:pt x="10920984" y="0"/>
-                  </a:lnTo>
-                  <a:close/>
-                </a:path>
-              </a:pathLst>
-            </a:custGeom>
-            <a:solidFill>
-              <a:srgbClr val="C0C0C0"/>
-            </a:solidFill>
-          </p:spPr>
-          <p:txBody>
-            <a:bodyPr wrap="square" lIns="0" tIns="0" rIns="0" bIns="0" rtlCol="0"/>
-            <a:lstStyle/>
-            <a:p>
-              <a:endParaRPr/>
-            </a:p>
-          </p:txBody>
-        </p:sp>
-        <p:sp>
-          <p:nvSpPr>
-            <p:cNvPr id="4" name="object 4"/>
-            <p:cNvSpPr/>
-            <p:nvPr/>
-          </p:nvSpPr>
-          <p:spPr>
-            <a:xfrm>
-              <a:off x="1044702" y="108965"/>
-              <a:ext cx="10921365" cy="6083935"/>
-            </a:xfrm>
-            <a:custGeom>
-              <a:avLst/>
-              <a:gdLst/>
-              <a:ahLst/>
-              <a:cxnLst/>
-              <a:rect l="l" t="t" r="r" b="b"/>
-              <a:pathLst>
-                <a:path w="10921365" h="6083935">
-                  <a:moveTo>
-                    <a:pt x="0" y="6083808"/>
-                  </a:moveTo>
-                  <a:lnTo>
-                    <a:pt x="10920984" y="6083808"/>
-                  </a:lnTo>
-                  <a:lnTo>
-                    <a:pt x="10920984" y="0"/>
-                  </a:lnTo>
-                  <a:lnTo>
-                    <a:pt x="0" y="0"/>
-                  </a:lnTo>
-                  <a:lnTo>
-                    <a:pt x="0" y="6083808"/>
-                  </a:lnTo>
-                  <a:close/>
-                </a:path>
-              </a:pathLst>
-            </a:custGeom>
-            <a:ln w="25400">
-              <a:solidFill>
-                <a:srgbClr val="FFFFFF"/>
-              </a:solidFill>
-            </a:ln>
-          </p:spPr>
-          <p:txBody>
-            <a:bodyPr wrap="square" lIns="0" tIns="0" rIns="0" bIns="0" rtlCol="0"/>
-            <a:lstStyle/>
-            <a:p>
-              <a:endParaRPr/>
-            </a:p>
-          </p:txBody>
-        </p:sp>
-        <p:sp>
-          <p:nvSpPr>
-            <p:cNvPr id="5" name="object 5"/>
-            <p:cNvSpPr/>
-            <p:nvPr/>
-          </p:nvSpPr>
-          <p:spPr>
-            <a:xfrm>
-              <a:off x="1065276" y="128015"/>
-              <a:ext cx="10878820" cy="285115"/>
-            </a:xfrm>
-            <a:custGeom>
-              <a:avLst/>
-              <a:gdLst/>
-              <a:ahLst/>
-              <a:cxnLst/>
-              <a:rect l="l" t="t" r="r" b="b"/>
-              <a:pathLst>
-                <a:path w="10878820" h="285115">
-                  <a:moveTo>
-                    <a:pt x="10878312" y="0"/>
-                  </a:moveTo>
-                  <a:lnTo>
-                    <a:pt x="0" y="0"/>
-                  </a:lnTo>
-                  <a:lnTo>
-                    <a:pt x="0" y="284988"/>
-                  </a:lnTo>
-                  <a:lnTo>
-                    <a:pt x="10878312" y="284988"/>
-                  </a:lnTo>
-                  <a:lnTo>
-                    <a:pt x="10878312" y="0"/>
-                  </a:lnTo>
-                  <a:close/>
-                </a:path>
-              </a:pathLst>
-            </a:custGeom>
-            <a:solidFill>
-              <a:srgbClr val="000080"/>
-            </a:solidFill>
-          </p:spPr>
-          <p:txBody>
-            <a:bodyPr wrap="square" lIns="0" tIns="0" rIns="0" bIns="0" rtlCol="0"/>
-            <a:lstStyle/>
-            <a:p>
-              <a:endParaRPr/>
-            </a:p>
-          </p:txBody>
-        </p:sp>
-        <p:sp>
-          <p:nvSpPr>
-            <p:cNvPr id="6" name="object 6"/>
-            <p:cNvSpPr/>
-            <p:nvPr/>
-          </p:nvSpPr>
-          <p:spPr>
-            <a:xfrm>
-              <a:off x="1168146" y="514349"/>
-              <a:ext cx="10674350" cy="5577840"/>
-            </a:xfrm>
-            <a:custGeom>
-              <a:avLst/>
-              <a:gdLst/>
-              <a:ahLst/>
-              <a:cxnLst/>
-              <a:rect l="l" t="t" r="r" b="b"/>
-              <a:pathLst>
-                <a:path w="10674350" h="5577840">
-                  <a:moveTo>
-                    <a:pt x="0" y="5577840"/>
-                  </a:moveTo>
-                  <a:lnTo>
-                    <a:pt x="10674096" y="5577840"/>
-                  </a:lnTo>
-                  <a:lnTo>
-                    <a:pt x="10674096" y="0"/>
-                  </a:lnTo>
-                  <a:lnTo>
-                    <a:pt x="0" y="0"/>
-                  </a:lnTo>
-                  <a:lnTo>
-                    <a:pt x="0" y="5577840"/>
-                  </a:lnTo>
-                  <a:close/>
-                </a:path>
-              </a:pathLst>
-            </a:custGeom>
-            <a:ln w="25400">
-              <a:solidFill>
-                <a:srgbClr val="808080"/>
-              </a:solidFill>
-            </a:ln>
-          </p:spPr>
-          <p:txBody>
-            <a:bodyPr wrap="square" lIns="0" tIns="0" rIns="0" bIns="0" rtlCol="0"/>
-            <a:lstStyle/>
-            <a:p>
-              <a:endParaRPr/>
-            </a:p>
-          </p:txBody>
-        </p:sp>
-        <p:sp>
-          <p:nvSpPr>
-            <p:cNvPr id="7" name="object 7"/>
-            <p:cNvSpPr/>
-            <p:nvPr/>
-          </p:nvSpPr>
-          <p:spPr>
-            <a:xfrm>
-              <a:off x="11675363" y="158496"/>
-              <a:ext cx="227329" cy="222885"/>
-            </a:xfrm>
-            <a:custGeom>
-              <a:avLst/>
-              <a:gdLst/>
-              <a:ahLst/>
-              <a:cxnLst/>
-              <a:rect l="l" t="t" r="r" b="b"/>
-              <a:pathLst>
-                <a:path w="227329" h="222885">
-                  <a:moveTo>
-                    <a:pt x="227075" y="0"/>
-                  </a:moveTo>
-                  <a:lnTo>
-                    <a:pt x="0" y="0"/>
-                  </a:lnTo>
-                  <a:lnTo>
-                    <a:pt x="0" y="222503"/>
-                  </a:lnTo>
-                  <a:lnTo>
-                    <a:pt x="227075" y="222503"/>
-                  </a:lnTo>
-                  <a:lnTo>
-                    <a:pt x="227075" y="0"/>
-                  </a:lnTo>
-                  <a:close/>
-                </a:path>
-              </a:pathLst>
-            </a:custGeom>
-            <a:solidFill>
-              <a:srgbClr val="C0C0C0"/>
-            </a:solidFill>
-          </p:spPr>
-          <p:txBody>
-            <a:bodyPr wrap="square" lIns="0" tIns="0" rIns="0" bIns="0" rtlCol="0"/>
-            <a:lstStyle/>
-            <a:p>
-              <a:endParaRPr/>
-            </a:p>
-          </p:txBody>
-        </p:sp>
-        <p:sp>
-          <p:nvSpPr>
-            <p:cNvPr id="8" name="object 8"/>
-            <p:cNvSpPr/>
-            <p:nvPr/>
-          </p:nvSpPr>
-          <p:spPr>
-            <a:xfrm>
-              <a:off x="11675363" y="158496"/>
-              <a:ext cx="227329" cy="222885"/>
-            </a:xfrm>
-            <a:custGeom>
-              <a:avLst/>
-              <a:gdLst/>
-              <a:ahLst/>
-              <a:cxnLst/>
-              <a:rect l="l" t="t" r="r" b="b"/>
-              <a:pathLst>
-                <a:path w="227329" h="222885">
-                  <a:moveTo>
-                    <a:pt x="0" y="222503"/>
-                  </a:moveTo>
-                  <a:lnTo>
-                    <a:pt x="227075" y="222503"/>
-                  </a:lnTo>
-                  <a:lnTo>
-                    <a:pt x="227075" y="0"/>
-                  </a:lnTo>
-                  <a:lnTo>
-                    <a:pt x="0" y="0"/>
-                  </a:lnTo>
-                  <a:lnTo>
-                    <a:pt x="0" y="222503"/>
-                  </a:lnTo>
-                  <a:close/>
-                </a:path>
-              </a:pathLst>
-            </a:custGeom>
-            <a:ln w="12700">
-              <a:solidFill>
-                <a:srgbClr val="FFFFFF"/>
-              </a:solidFill>
-            </a:ln>
-          </p:spPr>
-          <p:txBody>
-            <a:bodyPr wrap="square" lIns="0" tIns="0" rIns="0" bIns="0" rtlCol="0"/>
-            <a:lstStyle/>
-            <a:p>
-              <a:endParaRPr/>
-            </a:p>
-          </p:txBody>
-        </p:sp>
-      </p:grpSp>
-      <p:sp>
-        <p:nvSpPr>
-          <p:cNvPr id="9" name="object 9"/>
-          <p:cNvSpPr txBox="1"/>
-          <p:nvPr/>
-        </p:nvSpPr>
-        <p:spPr>
-          <a:xfrm>
-            <a:off x="1185773" y="186054"/>
-            <a:ext cx="1047115" cy="177800"/>
-          </a:xfrm>
-          <a:prstGeom prst="rect">
-            <a:avLst/>
-          </a:prstGeom>
-        </p:spPr>
-        <p:txBody>
-          <a:bodyPr vert="horz" wrap="square" lIns="0" tIns="12065" rIns="0" bIns="0" rtlCol="0">
-            <a:spAutoFit/>
-          </a:bodyPr>
-          <a:lstStyle/>
-          <a:p>
-            <a:pPr marL="12700">
-              <a:lnSpc>
-                <a:spcPct val="100000"/>
-              </a:lnSpc>
-              <a:spcBef>
-                <a:spcPts val="95"/>
-              </a:spcBef>
-            </a:pPr>
-            <a:r>
-              <a:rPr sz="1000" b="1" dirty="0">
-                <a:solidFill>
-                  <a:srgbClr val="FFFFFF"/>
-                </a:solidFill>
-                <a:latin typeface="Calibri"/>
-                <a:cs typeface="Calibri"/>
-              </a:rPr>
-              <a:t>World</a:t>
-            </a:r>
-            <a:r>
-              <a:rPr sz="1000" b="1" spc="-35" dirty="0">
-                <a:solidFill>
-                  <a:srgbClr val="FFFFFF"/>
-                </a:solidFill>
-                <a:latin typeface="Calibri"/>
-                <a:cs typeface="Calibri"/>
-              </a:rPr>
-              <a:t> </a:t>
-            </a:r>
-            <a:r>
-              <a:rPr sz="1000" b="1" dirty="0">
-                <a:solidFill>
-                  <a:srgbClr val="FFFFFF"/>
-                </a:solidFill>
-                <a:latin typeface="Calibri"/>
-                <a:cs typeface="Calibri"/>
-              </a:rPr>
-              <a:t>First</a:t>
-            </a:r>
-            <a:r>
-              <a:rPr sz="1000" b="1" spc="-20" dirty="0">
-                <a:solidFill>
-                  <a:srgbClr val="FFFFFF"/>
-                </a:solidFill>
-                <a:latin typeface="Calibri"/>
-                <a:cs typeface="Calibri"/>
-              </a:rPr>
-              <a:t> </a:t>
-            </a:r>
-            <a:r>
-              <a:rPr sz="1000" b="1" spc="-10" dirty="0">
-                <a:solidFill>
-                  <a:srgbClr val="FFFFFF"/>
-                </a:solidFill>
-                <a:latin typeface="Calibri"/>
-                <a:cs typeface="Calibri"/>
-              </a:rPr>
-              <a:t>Kill</a:t>
-            </a:r>
-            <a:r>
-              <a:rPr sz="1000" b="1" spc="-10" dirty="0">
-                <a:solidFill>
-                  <a:srgbClr val="FFFFFF"/>
-                </a:solidFill>
-                <a:latin typeface="Arial"/>
-                <a:cs typeface="Arial"/>
-              </a:rPr>
-              <a:t>.exe</a:t>
-            </a:r>
-            <a:endParaRPr sz="1000" dirty="0">
-              <a:latin typeface="Arial"/>
-              <a:cs typeface="Arial"/>
-            </a:endParaRPr>
-          </a:p>
-        </p:txBody>
-      </p:sp>
-      <p:sp>
-        <p:nvSpPr>
-          <p:cNvPr id="10" name="object 10"/>
-          <p:cNvSpPr txBox="1"/>
-          <p:nvPr/>
-        </p:nvSpPr>
-        <p:spPr>
-          <a:xfrm>
-            <a:off x="11743690" y="183260"/>
-            <a:ext cx="102235" cy="162560"/>
-          </a:xfrm>
-          <a:prstGeom prst="rect">
-            <a:avLst/>
-          </a:prstGeom>
-        </p:spPr>
-        <p:txBody>
-          <a:bodyPr vert="horz" wrap="square" lIns="0" tIns="12700" rIns="0" bIns="0" rtlCol="0">
-            <a:spAutoFit/>
-          </a:bodyPr>
-          <a:lstStyle/>
-          <a:p>
-            <a:pPr marL="12700">
-              <a:lnSpc>
-                <a:spcPct val="100000"/>
-              </a:lnSpc>
-              <a:spcBef>
-                <a:spcPts val="100"/>
-              </a:spcBef>
-            </a:pPr>
-            <a:r>
-              <a:rPr sz="900" b="1" spc="-50" dirty="0">
-                <a:latin typeface="Arial"/>
-                <a:cs typeface="Arial"/>
-              </a:rPr>
-              <a:t>X</a:t>
-            </a:r>
-            <a:endParaRPr sz="900">
-              <a:latin typeface="Arial"/>
-              <a:cs typeface="Arial"/>
-            </a:endParaRPr>
-          </a:p>
-        </p:txBody>
-      </p:sp>
-      <p:grpSp>
-        <p:nvGrpSpPr>
-          <p:cNvPr id="11" name="object 11"/>
-          <p:cNvGrpSpPr/>
-          <p:nvPr/>
-        </p:nvGrpSpPr>
-        <p:grpSpPr>
-          <a:xfrm>
-            <a:off x="0" y="6476999"/>
-            <a:ext cx="12192000" cy="381000"/>
-            <a:chOff x="0" y="6476999"/>
-            <a:chExt cx="12192000" cy="381000"/>
-          </a:xfrm>
-        </p:grpSpPr>
-        <p:sp>
-          <p:nvSpPr>
-            <p:cNvPr id="12" name="object 12"/>
-            <p:cNvSpPr/>
-            <p:nvPr/>
-          </p:nvSpPr>
-          <p:spPr>
-            <a:xfrm>
-              <a:off x="0" y="6476999"/>
-              <a:ext cx="12192000" cy="381000"/>
-            </a:xfrm>
-            <a:custGeom>
-              <a:avLst/>
-              <a:gdLst/>
-              <a:ahLst/>
-              <a:cxnLst/>
-              <a:rect l="l" t="t" r="r" b="b"/>
-              <a:pathLst>
-                <a:path w="12192000" h="381000">
-                  <a:moveTo>
-                    <a:pt x="12192000" y="0"/>
-                  </a:moveTo>
-                  <a:lnTo>
-                    <a:pt x="0" y="0"/>
-                  </a:lnTo>
-                  <a:lnTo>
-                    <a:pt x="0" y="380999"/>
-                  </a:lnTo>
-                  <a:lnTo>
-                    <a:pt x="12192000" y="380999"/>
-                  </a:lnTo>
-                  <a:lnTo>
-                    <a:pt x="12192000" y="0"/>
-                  </a:lnTo>
-                  <a:close/>
-                </a:path>
-              </a:pathLst>
-            </a:custGeom>
-            <a:solidFill>
-              <a:srgbClr val="C0C0C0"/>
-            </a:solidFill>
-          </p:spPr>
-          <p:txBody>
-            <a:bodyPr wrap="square" lIns="0" tIns="0" rIns="0" bIns="0" rtlCol="0"/>
-            <a:lstStyle/>
-            <a:p>
-              <a:endParaRPr/>
-            </a:p>
-          </p:txBody>
-        </p:sp>
-        <p:sp>
-          <p:nvSpPr>
-            <p:cNvPr id="13" name="object 13"/>
-            <p:cNvSpPr/>
-            <p:nvPr/>
-          </p:nvSpPr>
-          <p:spPr>
-            <a:xfrm>
-              <a:off x="0" y="6476999"/>
-              <a:ext cx="12192000" cy="18415"/>
-            </a:xfrm>
-            <a:custGeom>
-              <a:avLst/>
-              <a:gdLst/>
-              <a:ahLst/>
-              <a:cxnLst/>
-              <a:rect l="l" t="t" r="r" b="b"/>
-              <a:pathLst>
-                <a:path w="12192000" h="18414">
-                  <a:moveTo>
-                    <a:pt x="12192000" y="0"/>
-                  </a:moveTo>
-                  <a:lnTo>
-                    <a:pt x="0" y="0"/>
-                  </a:lnTo>
-                  <a:lnTo>
-                    <a:pt x="0" y="18288"/>
-                  </a:lnTo>
-                  <a:lnTo>
-                    <a:pt x="12192000" y="18288"/>
-                  </a:lnTo>
-                  <a:lnTo>
-                    <a:pt x="12192000" y="0"/>
-                  </a:lnTo>
-                  <a:close/>
-                </a:path>
-              </a:pathLst>
-            </a:custGeom>
-            <a:solidFill>
-              <a:srgbClr val="FFFFFF"/>
-            </a:solidFill>
-          </p:spPr>
-          <p:txBody>
-            <a:bodyPr wrap="square" lIns="0" tIns="0" rIns="0" bIns="0" rtlCol="0"/>
-            <a:lstStyle/>
-            <a:p>
-              <a:endParaRPr/>
-            </a:p>
-          </p:txBody>
-        </p:sp>
-        <p:sp>
-          <p:nvSpPr>
-            <p:cNvPr id="14" name="object 14"/>
-            <p:cNvSpPr/>
-            <p:nvPr/>
-          </p:nvSpPr>
-          <p:spPr>
-            <a:xfrm>
-              <a:off x="38861" y="6515860"/>
-              <a:ext cx="858519" cy="304800"/>
-            </a:xfrm>
-            <a:custGeom>
-              <a:avLst/>
-              <a:gdLst/>
-              <a:ahLst/>
-              <a:cxnLst/>
-              <a:rect l="l" t="t" r="r" b="b"/>
-              <a:pathLst>
-                <a:path w="858519" h="304800">
-                  <a:moveTo>
-                    <a:pt x="0" y="304800"/>
-                  </a:moveTo>
-                  <a:lnTo>
-                    <a:pt x="858012" y="304800"/>
-                  </a:lnTo>
-                  <a:lnTo>
-                    <a:pt x="858012" y="0"/>
-                  </a:lnTo>
-                  <a:lnTo>
-                    <a:pt x="0" y="0"/>
-                  </a:lnTo>
-                  <a:lnTo>
-                    <a:pt x="0" y="304800"/>
-                  </a:lnTo>
-                  <a:close/>
-                </a:path>
-              </a:pathLst>
-            </a:custGeom>
-            <a:ln w="25400">
-              <a:solidFill>
-                <a:srgbClr val="FFFFFF"/>
-              </a:solidFill>
-            </a:ln>
-          </p:spPr>
-          <p:txBody>
-            <a:bodyPr wrap="square" lIns="0" tIns="0" rIns="0" bIns="0" rtlCol="0"/>
-            <a:lstStyle/>
-            <a:p>
-              <a:endParaRPr/>
-            </a:p>
-          </p:txBody>
-        </p:sp>
-        <p:sp>
-          <p:nvSpPr>
-            <p:cNvPr id="15" name="object 15"/>
-            <p:cNvSpPr/>
-            <p:nvPr/>
-          </p:nvSpPr>
-          <p:spPr>
-            <a:xfrm>
-              <a:off x="953261" y="6515860"/>
-              <a:ext cx="1714500" cy="304800"/>
-            </a:xfrm>
-            <a:custGeom>
-              <a:avLst/>
-              <a:gdLst/>
-              <a:ahLst/>
-              <a:cxnLst/>
-              <a:rect l="l" t="t" r="r" b="b"/>
-              <a:pathLst>
-                <a:path w="1714500" h="304800">
-                  <a:moveTo>
-                    <a:pt x="1714500" y="0"/>
-                  </a:moveTo>
-                  <a:lnTo>
-                    <a:pt x="0" y="0"/>
-                  </a:lnTo>
-                  <a:lnTo>
-                    <a:pt x="0" y="304800"/>
-                  </a:lnTo>
-                  <a:lnTo>
-                    <a:pt x="1714500" y="304800"/>
-                  </a:lnTo>
-                  <a:lnTo>
-                    <a:pt x="1714500" y="0"/>
-                  </a:lnTo>
-                  <a:close/>
-                </a:path>
-              </a:pathLst>
-            </a:custGeom>
-            <a:solidFill>
-              <a:srgbClr val="DFDFDF"/>
-            </a:solidFill>
-          </p:spPr>
-          <p:txBody>
-            <a:bodyPr wrap="square" lIns="0" tIns="0" rIns="0" bIns="0" rtlCol="0"/>
-            <a:lstStyle/>
-            <a:p>
-              <a:endParaRPr/>
-            </a:p>
-          </p:txBody>
-        </p:sp>
-        <p:sp>
-          <p:nvSpPr>
-            <p:cNvPr id="16" name="object 16"/>
-            <p:cNvSpPr/>
-            <p:nvPr/>
-          </p:nvSpPr>
-          <p:spPr>
-            <a:xfrm>
-              <a:off x="953261" y="6515860"/>
-              <a:ext cx="1714500" cy="304800"/>
-            </a:xfrm>
-            <a:custGeom>
-              <a:avLst/>
-              <a:gdLst/>
-              <a:ahLst/>
-              <a:cxnLst/>
-              <a:rect l="l" t="t" r="r" b="b"/>
-              <a:pathLst>
-                <a:path w="1714500" h="304800">
-                  <a:moveTo>
-                    <a:pt x="0" y="304800"/>
-                  </a:moveTo>
-                  <a:lnTo>
-                    <a:pt x="1714500" y="304800"/>
-                  </a:lnTo>
-                  <a:lnTo>
-                    <a:pt x="1714500" y="0"/>
-                  </a:lnTo>
-                  <a:lnTo>
-                    <a:pt x="0" y="0"/>
-                  </a:lnTo>
-                  <a:lnTo>
-                    <a:pt x="0" y="304800"/>
-                  </a:lnTo>
-                  <a:close/>
-                </a:path>
-              </a:pathLst>
-            </a:custGeom>
-            <a:ln w="25400">
-              <a:solidFill>
-                <a:srgbClr val="808080"/>
-              </a:solidFill>
-            </a:ln>
-          </p:spPr>
-          <p:txBody>
-            <a:bodyPr wrap="square" lIns="0" tIns="0" rIns="0" bIns="0" rtlCol="0"/>
-            <a:lstStyle/>
-            <a:p>
-              <a:endParaRPr/>
-            </a:p>
-          </p:txBody>
-        </p:sp>
-        <p:pic>
-          <p:nvPicPr>
-            <p:cNvPr id="17" name="object 17" descr="gen-dedup-b7042822c590cf1066a472ff1b5b8f45.png"/>
-            <p:cNvPicPr/>
-            <p:nvPr/>
-          </p:nvPicPr>
-          <p:blipFill>
-            <a:blip r:embed="rId2" cstate="print"/>
-            <a:stretch>
-              <a:fillRect/>
-            </a:stretch>
-          </p:blipFill>
-          <p:spPr>
-            <a:xfrm>
-              <a:off x="123825" y="6591298"/>
-              <a:ext cx="133350" cy="152398"/>
-            </a:xfrm>
-            <a:prstGeom prst="rect">
-              <a:avLst/>
-            </a:prstGeom>
-          </p:spPr>
-        </p:pic>
-        <p:pic>
-          <p:nvPicPr>
-            <p:cNvPr id="18" name="object 18" descr="gen-dedup-ba9d3020b28ee88c3f41e8c221d65fea.png"/>
-            <p:cNvPicPr/>
-            <p:nvPr/>
-          </p:nvPicPr>
-          <p:blipFill>
-            <a:blip r:embed="rId3" cstate="print"/>
-            <a:stretch>
-              <a:fillRect/>
-            </a:stretch>
-          </p:blipFill>
-          <p:spPr>
-            <a:xfrm>
-              <a:off x="1047750" y="6591298"/>
-              <a:ext cx="114301" cy="152398"/>
-            </a:xfrm>
-            <a:prstGeom prst="rect">
-              <a:avLst/>
-            </a:prstGeom>
-          </p:spPr>
-        </p:pic>
-      </p:grpSp>
-      <p:grpSp>
-        <p:nvGrpSpPr>
-          <p:cNvPr id="19" name="object 19"/>
-          <p:cNvGrpSpPr/>
-          <p:nvPr/>
-        </p:nvGrpSpPr>
-        <p:grpSpPr>
-          <a:xfrm>
-            <a:off x="257175" y="501650"/>
-            <a:ext cx="11662804" cy="5603240"/>
-            <a:chOff x="1166113" y="501650"/>
-            <a:chExt cx="10696575" cy="5603240"/>
-          </a:xfrm>
-        </p:grpSpPr>
-        <p:sp>
-          <p:nvSpPr>
-            <p:cNvPr id="20" name="object 20"/>
-            <p:cNvSpPr/>
-            <p:nvPr/>
-          </p:nvSpPr>
-          <p:spPr>
-            <a:xfrm>
-              <a:off x="1178813" y="514350"/>
-              <a:ext cx="10671175" cy="5577840"/>
-            </a:xfrm>
-            <a:custGeom>
-              <a:avLst/>
-              <a:gdLst/>
-              <a:ahLst/>
-              <a:cxnLst/>
-              <a:rect l="l" t="t" r="r" b="b"/>
-              <a:pathLst>
-                <a:path w="10671175" h="5577840">
-                  <a:moveTo>
-                    <a:pt x="10671048" y="0"/>
-                  </a:moveTo>
-                  <a:lnTo>
-                    <a:pt x="0" y="0"/>
-                  </a:lnTo>
-                  <a:lnTo>
-                    <a:pt x="0" y="5577840"/>
-                  </a:lnTo>
-                  <a:lnTo>
-                    <a:pt x="10671048" y="5577840"/>
-                  </a:lnTo>
-                  <a:lnTo>
-                    <a:pt x="10671048" y="0"/>
-                  </a:lnTo>
-                  <a:close/>
-                </a:path>
-              </a:pathLst>
-            </a:custGeom>
-            <a:solidFill>
-              <a:srgbClr val="E8E8E8"/>
-            </a:solidFill>
-          </p:spPr>
-          <p:txBody>
-            <a:bodyPr wrap="square" lIns="0" tIns="0" rIns="0" bIns="0" rtlCol="0"/>
-            <a:lstStyle/>
-            <a:p>
-              <a:endParaRPr/>
-            </a:p>
-          </p:txBody>
-        </p:sp>
-        <p:sp>
-          <p:nvSpPr>
-            <p:cNvPr id="21" name="object 21"/>
-            <p:cNvSpPr/>
-            <p:nvPr/>
-          </p:nvSpPr>
-          <p:spPr>
-            <a:xfrm>
-              <a:off x="1178813" y="514350"/>
-              <a:ext cx="10671175" cy="5577840"/>
-            </a:xfrm>
-            <a:custGeom>
-              <a:avLst/>
-              <a:gdLst/>
-              <a:ahLst/>
-              <a:cxnLst/>
-              <a:rect l="l" t="t" r="r" b="b"/>
-              <a:pathLst>
-                <a:path w="10671175" h="5577840">
-                  <a:moveTo>
-                    <a:pt x="0" y="5577840"/>
-                  </a:moveTo>
-                  <a:lnTo>
-                    <a:pt x="10671048" y="5577840"/>
-                  </a:lnTo>
-                  <a:lnTo>
-                    <a:pt x="10671048" y="0"/>
-                  </a:lnTo>
-                  <a:lnTo>
-                    <a:pt x="0" y="0"/>
-                  </a:lnTo>
-                  <a:lnTo>
-                    <a:pt x="0" y="5577840"/>
-                  </a:lnTo>
-                  <a:close/>
-                </a:path>
-              </a:pathLst>
-            </a:custGeom>
-            <a:ln w="25400">
-              <a:solidFill>
-                <a:srgbClr val="808080"/>
-              </a:solidFill>
-            </a:ln>
-          </p:spPr>
-          <p:txBody>
-            <a:bodyPr wrap="square" lIns="0" tIns="0" rIns="0" bIns="0" rtlCol="0"/>
-            <a:lstStyle/>
-            <a:p>
-              <a:endParaRPr/>
-            </a:p>
-          </p:txBody>
-        </p:sp>
-      </p:grpSp>
-      <p:sp>
-        <p:nvSpPr>
-          <p:cNvPr id="22" name="object 22"/>
-          <p:cNvSpPr txBox="1"/>
-          <p:nvPr/>
-        </p:nvSpPr>
-        <p:spPr>
-          <a:xfrm>
-            <a:off x="270954" y="665987"/>
-            <a:ext cx="11649025" cy="319318"/>
-          </a:xfrm>
-          <a:prstGeom prst="rect">
-            <a:avLst/>
-          </a:prstGeom>
-          <a:solidFill>
-            <a:srgbClr val="000080"/>
-          </a:solidFill>
-        </p:spPr>
-        <p:txBody>
-          <a:bodyPr vert="horz" wrap="square" lIns="0" tIns="41910" rIns="0" bIns="0" rtlCol="0">
-            <a:spAutoFit/>
-          </a:bodyPr>
-          <a:lstStyle/>
-          <a:p>
-            <a:pPr marL="1905" algn="ctr">
-              <a:lnSpc>
-                <a:spcPct val="100000"/>
-              </a:lnSpc>
-              <a:spcBef>
-                <a:spcPts val="330"/>
-              </a:spcBef>
-            </a:pPr>
-            <a:r>
-              <a:rPr sz="1800" dirty="0">
-                <a:solidFill>
-                  <a:srgbClr val="FFFFFF"/>
-                </a:solidFill>
-                <a:latin typeface="Consolas"/>
-                <a:cs typeface="Consolas"/>
-              </a:rPr>
-              <a:t>1826533749</a:t>
-            </a:r>
-            <a:r>
-              <a:rPr sz="1800" spc="-15" dirty="0">
-                <a:solidFill>
-                  <a:srgbClr val="FFFFFF"/>
-                </a:solidFill>
-                <a:latin typeface="Consolas"/>
-                <a:cs typeface="Consolas"/>
-              </a:rPr>
-              <a:t> </a:t>
-            </a:r>
-            <a:r>
-              <a:rPr sz="1800" dirty="0">
-                <a:solidFill>
-                  <a:srgbClr val="FFFFFF"/>
-                </a:solidFill>
-                <a:latin typeface="Consolas"/>
-                <a:cs typeface="Consolas"/>
-              </a:rPr>
-              <a:t>Seed</a:t>
-            </a:r>
-            <a:r>
-              <a:rPr sz="1800" spc="-15" dirty="0">
-                <a:solidFill>
-                  <a:srgbClr val="FFFFFF"/>
-                </a:solidFill>
-                <a:latin typeface="Consolas"/>
-                <a:cs typeface="Consolas"/>
-              </a:rPr>
-              <a:t> </a:t>
-            </a:r>
-            <a:r>
-              <a:rPr sz="1800" dirty="0">
-                <a:solidFill>
-                  <a:srgbClr val="FFFFFF"/>
-                </a:solidFill>
-                <a:latin typeface="Malgun Gothic"/>
-                <a:cs typeface="Malgun Gothic"/>
-              </a:rPr>
-              <a:t>예시로</a:t>
-            </a:r>
-            <a:r>
-              <a:rPr sz="1800" spc="320" dirty="0">
-                <a:solidFill>
-                  <a:srgbClr val="FFFFFF"/>
-                </a:solidFill>
-                <a:latin typeface="Malgun Gothic"/>
-                <a:cs typeface="Malgun Gothic"/>
-              </a:rPr>
-              <a:t> </a:t>
-            </a:r>
-            <a:r>
-              <a:rPr sz="1800" dirty="0">
-                <a:solidFill>
-                  <a:srgbClr val="FFFFFF"/>
-                </a:solidFill>
-                <a:latin typeface="Malgun Gothic"/>
-                <a:cs typeface="Malgun Gothic"/>
-              </a:rPr>
-              <a:t>결과</a:t>
-            </a:r>
-            <a:r>
-              <a:rPr sz="1800" spc="325" dirty="0">
-                <a:solidFill>
-                  <a:srgbClr val="FFFFFF"/>
-                </a:solidFill>
-                <a:latin typeface="Malgun Gothic"/>
-                <a:cs typeface="Malgun Gothic"/>
-              </a:rPr>
-              <a:t> </a:t>
-            </a:r>
-            <a:r>
-              <a:rPr sz="1800" spc="-20" dirty="0">
-                <a:solidFill>
-                  <a:srgbClr val="FFFFFF"/>
-                </a:solidFill>
-                <a:latin typeface="Malgun Gothic"/>
-                <a:cs typeface="Malgun Gothic"/>
-              </a:rPr>
-              <a:t>살펴보기</a:t>
-            </a:r>
-            <a:endParaRPr sz="1800">
-              <a:latin typeface="Malgun Gothic"/>
-              <a:cs typeface="Malgun Gothic"/>
-            </a:endParaRPr>
-          </a:p>
-        </p:txBody>
-      </p:sp>
-      <p:sp>
-        <p:nvSpPr>
-          <p:cNvPr id="23" name="object 23"/>
-          <p:cNvSpPr txBox="1"/>
-          <p:nvPr/>
-        </p:nvSpPr>
-        <p:spPr>
-          <a:xfrm>
-            <a:off x="1931951" y="1104751"/>
-            <a:ext cx="2743200" cy="401320"/>
-          </a:xfrm>
-          <a:prstGeom prst="rect">
-            <a:avLst/>
-          </a:prstGeom>
-          <a:solidFill>
-            <a:srgbClr val="C0C0C0"/>
-          </a:solidFill>
-          <a:ln w="25400">
-            <a:solidFill>
-              <a:srgbClr val="FFFFFF"/>
-            </a:solidFill>
-          </a:ln>
-        </p:spPr>
-        <p:txBody>
-          <a:bodyPr vert="horz" wrap="square" lIns="0" tIns="83185" rIns="0" bIns="0" rtlCol="0">
-            <a:spAutoFit/>
-          </a:bodyPr>
-          <a:lstStyle/>
-          <a:p>
-            <a:pPr marL="407034">
-              <a:lnSpc>
-                <a:spcPct val="100000"/>
-              </a:lnSpc>
-              <a:spcBef>
-                <a:spcPts val="655"/>
-              </a:spcBef>
-            </a:pPr>
-            <a:r>
-              <a:rPr sz="1200" b="1" dirty="0">
-                <a:latin typeface="Gulim"/>
-                <a:cs typeface="Gulim"/>
-              </a:rPr>
-              <a:t>데이터</a:t>
-            </a:r>
-            <a:r>
-              <a:rPr sz="1200" b="1" spc="-35" dirty="0">
-                <a:latin typeface="Gulim"/>
-                <a:cs typeface="Gulim"/>
-              </a:rPr>
-              <a:t> </a:t>
-            </a:r>
-            <a:r>
-              <a:rPr sz="1200" b="1" dirty="0">
-                <a:latin typeface="Gulim"/>
-                <a:cs typeface="Gulim"/>
-              </a:rPr>
-              <a:t>인코딩</a:t>
-            </a:r>
-            <a:r>
-              <a:rPr sz="1200" b="1" spc="-30" dirty="0">
-                <a:latin typeface="Gulim"/>
-                <a:cs typeface="Gulim"/>
-              </a:rPr>
-              <a:t> </a:t>
-            </a:r>
-            <a:r>
-              <a:rPr sz="1200" b="1" dirty="0">
-                <a:latin typeface="Gulim"/>
-                <a:cs typeface="Gulim"/>
-              </a:rPr>
-              <a:t>&amp;</a:t>
-            </a:r>
-            <a:r>
-              <a:rPr sz="1200" b="1" spc="25" dirty="0">
-                <a:latin typeface="Gulim"/>
-                <a:cs typeface="Gulim"/>
-              </a:rPr>
-              <a:t> </a:t>
-            </a:r>
-            <a:r>
-              <a:rPr sz="1200" b="1" dirty="0">
-                <a:latin typeface="Gulim"/>
-                <a:cs typeface="Gulim"/>
-              </a:rPr>
-              <a:t>JSON</a:t>
-            </a:r>
-            <a:r>
-              <a:rPr sz="1200" b="1" spc="-20" dirty="0">
-                <a:latin typeface="Gulim"/>
-                <a:cs typeface="Gulim"/>
-              </a:rPr>
-              <a:t> </a:t>
-            </a:r>
-            <a:r>
-              <a:rPr sz="1200" b="1" spc="-25" dirty="0">
-                <a:latin typeface="Gulim"/>
-                <a:cs typeface="Gulim"/>
-              </a:rPr>
-              <a:t>예시</a:t>
-            </a:r>
-            <a:endParaRPr sz="1200">
-              <a:latin typeface="Gulim"/>
-              <a:cs typeface="Gulim"/>
-            </a:endParaRPr>
-          </a:p>
-        </p:txBody>
-      </p:sp>
-      <p:grpSp>
-        <p:nvGrpSpPr>
-          <p:cNvPr id="24" name="object 24"/>
-          <p:cNvGrpSpPr/>
-          <p:nvPr/>
-        </p:nvGrpSpPr>
-        <p:grpSpPr>
-          <a:xfrm>
-            <a:off x="6907024" y="1611666"/>
-            <a:ext cx="4572000" cy="1266825"/>
-            <a:chOff x="7152893" y="1622297"/>
-            <a:chExt cx="4572000" cy="1266825"/>
-          </a:xfrm>
-        </p:grpSpPr>
-        <p:sp>
-          <p:nvSpPr>
-            <p:cNvPr id="25" name="object 25"/>
-            <p:cNvSpPr/>
-            <p:nvPr/>
-          </p:nvSpPr>
-          <p:spPr>
-            <a:xfrm>
-              <a:off x="7152893" y="1622297"/>
-              <a:ext cx="4572000" cy="1266825"/>
-            </a:xfrm>
-            <a:custGeom>
-              <a:avLst/>
-              <a:gdLst/>
-              <a:ahLst/>
-              <a:cxnLst/>
-              <a:rect l="l" t="t" r="r" b="b"/>
-              <a:pathLst>
-                <a:path w="4572000" h="1266825">
-                  <a:moveTo>
-                    <a:pt x="4572000" y="0"/>
-                  </a:moveTo>
-                  <a:lnTo>
-                    <a:pt x="0" y="0"/>
-                  </a:lnTo>
-                  <a:lnTo>
-                    <a:pt x="0" y="1266443"/>
-                  </a:lnTo>
-                  <a:lnTo>
-                    <a:pt x="4572000" y="1266443"/>
-                  </a:lnTo>
-                  <a:lnTo>
-                    <a:pt x="4572000" y="0"/>
-                  </a:lnTo>
-                  <a:close/>
-                </a:path>
-              </a:pathLst>
-            </a:custGeom>
-            <a:solidFill>
-              <a:srgbClr val="FFFFFF"/>
-            </a:solidFill>
-          </p:spPr>
-          <p:txBody>
-            <a:bodyPr wrap="square" lIns="0" tIns="0" rIns="0" bIns="0" rtlCol="0"/>
-            <a:lstStyle/>
-            <a:p>
-              <a:endParaRPr/>
-            </a:p>
-          </p:txBody>
-        </p:sp>
-        <p:sp>
-          <p:nvSpPr>
-            <p:cNvPr id="26" name="object 26"/>
-            <p:cNvSpPr/>
-            <p:nvPr/>
-          </p:nvSpPr>
-          <p:spPr>
-            <a:xfrm>
-              <a:off x="7409687" y="1970531"/>
-              <a:ext cx="571500" cy="571500"/>
-            </a:xfrm>
-            <a:custGeom>
-              <a:avLst/>
-              <a:gdLst/>
-              <a:ahLst/>
-              <a:cxnLst/>
-              <a:rect l="l" t="t" r="r" b="b"/>
-              <a:pathLst>
-                <a:path w="571500" h="571500">
-                  <a:moveTo>
-                    <a:pt x="285750" y="0"/>
-                  </a:moveTo>
-                  <a:lnTo>
-                    <a:pt x="239388" y="3738"/>
-                  </a:lnTo>
-                  <a:lnTo>
-                    <a:pt x="195413" y="14563"/>
-                  </a:lnTo>
-                  <a:lnTo>
-                    <a:pt x="154411" y="31886"/>
-                  </a:lnTo>
-                  <a:lnTo>
-                    <a:pt x="116970" y="55120"/>
-                  </a:lnTo>
-                  <a:lnTo>
-                    <a:pt x="83677" y="83677"/>
-                  </a:lnTo>
-                  <a:lnTo>
-                    <a:pt x="55120" y="116970"/>
-                  </a:lnTo>
-                  <a:lnTo>
-                    <a:pt x="31886" y="154411"/>
-                  </a:lnTo>
-                  <a:lnTo>
-                    <a:pt x="14563" y="195413"/>
-                  </a:lnTo>
-                  <a:lnTo>
-                    <a:pt x="3738" y="239388"/>
-                  </a:lnTo>
-                  <a:lnTo>
-                    <a:pt x="0" y="285750"/>
-                  </a:lnTo>
-                  <a:lnTo>
-                    <a:pt x="3738" y="332111"/>
-                  </a:lnTo>
-                  <a:lnTo>
-                    <a:pt x="14563" y="376086"/>
-                  </a:lnTo>
-                  <a:lnTo>
-                    <a:pt x="31886" y="417088"/>
-                  </a:lnTo>
-                  <a:lnTo>
-                    <a:pt x="55120" y="454529"/>
-                  </a:lnTo>
-                  <a:lnTo>
-                    <a:pt x="83677" y="487822"/>
-                  </a:lnTo>
-                  <a:lnTo>
-                    <a:pt x="116970" y="516379"/>
-                  </a:lnTo>
-                  <a:lnTo>
-                    <a:pt x="154411" y="539613"/>
-                  </a:lnTo>
-                  <a:lnTo>
-                    <a:pt x="195413" y="556936"/>
-                  </a:lnTo>
-                  <a:lnTo>
-                    <a:pt x="239388" y="567761"/>
-                  </a:lnTo>
-                  <a:lnTo>
-                    <a:pt x="285750" y="571500"/>
-                  </a:lnTo>
-                  <a:lnTo>
-                    <a:pt x="332111" y="567761"/>
-                  </a:lnTo>
-                  <a:lnTo>
-                    <a:pt x="376086" y="556936"/>
-                  </a:lnTo>
-                  <a:lnTo>
-                    <a:pt x="417088" y="539613"/>
-                  </a:lnTo>
-                  <a:lnTo>
-                    <a:pt x="454529" y="516379"/>
-                  </a:lnTo>
-                  <a:lnTo>
-                    <a:pt x="487822" y="487822"/>
-                  </a:lnTo>
-                  <a:lnTo>
-                    <a:pt x="516379" y="454529"/>
-                  </a:lnTo>
-                  <a:lnTo>
-                    <a:pt x="539613" y="417088"/>
-                  </a:lnTo>
-                  <a:lnTo>
-                    <a:pt x="556936" y="376086"/>
-                  </a:lnTo>
-                  <a:lnTo>
-                    <a:pt x="567761" y="332111"/>
-                  </a:lnTo>
-                  <a:lnTo>
-                    <a:pt x="571500" y="285750"/>
-                  </a:lnTo>
-                  <a:lnTo>
-                    <a:pt x="567761" y="239388"/>
-                  </a:lnTo>
-                  <a:lnTo>
-                    <a:pt x="556936" y="195413"/>
-                  </a:lnTo>
-                  <a:lnTo>
-                    <a:pt x="539613" y="154411"/>
-                  </a:lnTo>
-                  <a:lnTo>
-                    <a:pt x="516379" y="116970"/>
-                  </a:lnTo>
-                  <a:lnTo>
-                    <a:pt x="487822" y="83677"/>
-                  </a:lnTo>
-                  <a:lnTo>
-                    <a:pt x="454529" y="55120"/>
-                  </a:lnTo>
-                  <a:lnTo>
-                    <a:pt x="417088" y="31886"/>
-                  </a:lnTo>
-                  <a:lnTo>
-                    <a:pt x="376086" y="14563"/>
-                  </a:lnTo>
-                  <a:lnTo>
-                    <a:pt x="332111" y="3738"/>
-                  </a:lnTo>
-                  <a:lnTo>
-                    <a:pt x="285750" y="0"/>
-                  </a:lnTo>
-                  <a:close/>
-                </a:path>
-              </a:pathLst>
-            </a:custGeom>
-            <a:solidFill>
-              <a:srgbClr val="008080"/>
-            </a:solidFill>
-          </p:spPr>
-          <p:txBody>
-            <a:bodyPr wrap="square" lIns="0" tIns="0" rIns="0" bIns="0" rtlCol="0"/>
-            <a:lstStyle/>
-            <a:p>
-              <a:endParaRPr/>
-            </a:p>
-          </p:txBody>
-        </p:sp>
-        <p:pic>
-          <p:nvPicPr>
-            <p:cNvPr id="27" name="object 27" descr="gen-dedup-2fbfd2c3d482395f98fd4bea048be4e8.png"/>
-            <p:cNvPicPr/>
-            <p:nvPr/>
-          </p:nvPicPr>
-          <p:blipFill>
-            <a:blip r:embed="rId4" cstate="print"/>
-            <a:stretch>
-              <a:fillRect/>
-            </a:stretch>
-          </p:blipFill>
-          <p:spPr>
-            <a:xfrm>
-              <a:off x="7562087" y="2122931"/>
-              <a:ext cx="266700" cy="266700"/>
-            </a:xfrm>
-            <a:prstGeom prst="rect">
-              <a:avLst/>
-            </a:prstGeom>
-          </p:spPr>
-        </p:pic>
-      </p:grpSp>
-      <p:sp>
-        <p:nvSpPr>
-          <p:cNvPr id="28" name="object 28"/>
-          <p:cNvSpPr txBox="1"/>
-          <p:nvPr/>
-        </p:nvSpPr>
-        <p:spPr>
-          <a:xfrm>
-            <a:off x="6907024" y="1611666"/>
-            <a:ext cx="4572000" cy="1266825"/>
-          </a:xfrm>
-          <a:prstGeom prst="rect">
-            <a:avLst/>
-          </a:prstGeom>
-          <a:ln w="25400">
-            <a:solidFill>
-              <a:srgbClr val="C0C0C0"/>
-            </a:solidFill>
-          </a:ln>
-        </p:spPr>
-        <p:txBody>
-          <a:bodyPr vert="horz" wrap="square" lIns="0" tIns="86360" rIns="0" bIns="0" rtlCol="0">
-            <a:spAutoFit/>
-          </a:bodyPr>
-          <a:lstStyle/>
-          <a:p>
-            <a:pPr>
-              <a:lnSpc>
-                <a:spcPct val="100000"/>
-              </a:lnSpc>
-              <a:spcBef>
-                <a:spcPts val="680"/>
-              </a:spcBef>
-            </a:pPr>
-            <a:endParaRPr sz="1300" dirty="0">
-              <a:latin typeface="Times New Roman"/>
-              <a:cs typeface="Times New Roman"/>
-            </a:endParaRPr>
-          </a:p>
-          <a:p>
-            <a:pPr marL="1019175">
-              <a:lnSpc>
-                <a:spcPct val="100000"/>
-              </a:lnSpc>
-            </a:pPr>
-            <a:r>
-              <a:rPr sz="1300" b="1" dirty="0">
-                <a:solidFill>
-                  <a:srgbClr val="000080"/>
-                </a:solidFill>
-                <a:latin typeface="Gulim"/>
-                <a:cs typeface="Gulim"/>
-              </a:rPr>
-              <a:t>SeedToken</a:t>
-            </a:r>
-            <a:r>
-              <a:rPr sz="1300" b="1" spc="-55" dirty="0">
-                <a:solidFill>
-                  <a:srgbClr val="000080"/>
-                </a:solidFill>
-                <a:latin typeface="Gulim"/>
-                <a:cs typeface="Gulim"/>
-              </a:rPr>
-              <a:t> </a:t>
-            </a:r>
-            <a:r>
-              <a:rPr sz="1300" b="1" dirty="0">
-                <a:solidFill>
-                  <a:srgbClr val="000080"/>
-                </a:solidFill>
-                <a:latin typeface="Gulim"/>
-                <a:cs typeface="Gulim"/>
-              </a:rPr>
-              <a:t>완벽</a:t>
-            </a:r>
-            <a:r>
-              <a:rPr sz="1300" b="1" spc="-40" dirty="0">
-                <a:solidFill>
-                  <a:srgbClr val="000080"/>
-                </a:solidFill>
-                <a:latin typeface="Gulim"/>
-                <a:cs typeface="Gulim"/>
-              </a:rPr>
-              <a:t> </a:t>
-            </a:r>
-            <a:r>
-              <a:rPr sz="1300" b="1" spc="-25" dirty="0">
-                <a:solidFill>
-                  <a:srgbClr val="000080"/>
-                </a:solidFill>
-                <a:latin typeface="Gulim"/>
-                <a:cs typeface="Gulim"/>
-              </a:rPr>
-              <a:t>복원</a:t>
-            </a:r>
-            <a:endParaRPr sz="1300" dirty="0">
-              <a:latin typeface="Gulim"/>
-              <a:cs typeface="Gulim"/>
-            </a:endParaRPr>
-          </a:p>
-          <a:p>
-            <a:pPr marL="1019175" marR="304165">
-              <a:lnSpc>
-                <a:spcPts val="1250"/>
-              </a:lnSpc>
-              <a:spcBef>
-                <a:spcPts val="1345"/>
-              </a:spcBef>
-            </a:pPr>
-            <a:r>
-              <a:rPr sz="1100" dirty="0">
-                <a:solidFill>
-                  <a:srgbClr val="333333"/>
-                </a:solidFill>
-                <a:latin typeface="Gulim"/>
-                <a:cs typeface="Gulim"/>
-              </a:rPr>
-              <a:t>하나의</a:t>
-            </a:r>
-            <a:r>
-              <a:rPr sz="1100" spc="-25" dirty="0">
-                <a:solidFill>
-                  <a:srgbClr val="333333"/>
-                </a:solidFill>
-                <a:latin typeface="Gulim"/>
-                <a:cs typeface="Gulim"/>
-              </a:rPr>
-              <a:t> </a:t>
-            </a:r>
-            <a:r>
-              <a:rPr sz="1100" dirty="0">
-                <a:solidFill>
-                  <a:srgbClr val="333333"/>
-                </a:solidFill>
-                <a:latin typeface="Gulim"/>
-                <a:cs typeface="Gulim"/>
-              </a:rPr>
-              <a:t>SeedToken을</a:t>
-            </a:r>
-            <a:r>
-              <a:rPr sz="1100" spc="-40" dirty="0">
-                <a:solidFill>
-                  <a:srgbClr val="333333"/>
-                </a:solidFill>
-                <a:latin typeface="Gulim"/>
-                <a:cs typeface="Gulim"/>
-              </a:rPr>
-              <a:t> </a:t>
-            </a:r>
-            <a:r>
-              <a:rPr sz="1100" dirty="0">
-                <a:solidFill>
-                  <a:srgbClr val="333333"/>
-                </a:solidFill>
-                <a:latin typeface="Gulim"/>
-                <a:cs typeface="Gulim"/>
-              </a:rPr>
-              <a:t>이용해서</a:t>
-            </a:r>
-            <a:r>
-              <a:rPr sz="1100" spc="-25" dirty="0">
-                <a:solidFill>
-                  <a:srgbClr val="333333"/>
-                </a:solidFill>
-                <a:latin typeface="Gulim"/>
-                <a:cs typeface="Gulim"/>
-              </a:rPr>
-              <a:t> </a:t>
-            </a:r>
-            <a:r>
-              <a:rPr sz="1100" dirty="0">
-                <a:solidFill>
-                  <a:srgbClr val="333333"/>
-                </a:solidFill>
-                <a:latin typeface="Gulim"/>
-                <a:cs typeface="Gulim"/>
-              </a:rPr>
-              <a:t>게임</a:t>
-            </a:r>
-            <a:r>
-              <a:rPr sz="1100" spc="-10" dirty="0">
-                <a:solidFill>
-                  <a:srgbClr val="333333"/>
-                </a:solidFill>
-                <a:latin typeface="Gulim"/>
-                <a:cs typeface="Gulim"/>
-              </a:rPr>
-              <a:t> </a:t>
-            </a:r>
-            <a:r>
-              <a:rPr sz="1100" dirty="0">
-                <a:solidFill>
-                  <a:srgbClr val="333333"/>
-                </a:solidFill>
-                <a:latin typeface="Gulim"/>
-                <a:cs typeface="Gulim"/>
-              </a:rPr>
-              <a:t>내</a:t>
-            </a:r>
-            <a:r>
-              <a:rPr sz="1100" spc="-25" dirty="0">
-                <a:solidFill>
-                  <a:srgbClr val="333333"/>
-                </a:solidFill>
-                <a:latin typeface="Gulim"/>
-                <a:cs typeface="Gulim"/>
-              </a:rPr>
-              <a:t> </a:t>
-            </a:r>
-            <a:r>
-              <a:rPr sz="1100" dirty="0">
-                <a:solidFill>
-                  <a:srgbClr val="333333"/>
-                </a:solidFill>
-                <a:latin typeface="Gulim"/>
-                <a:cs typeface="Gulim"/>
-              </a:rPr>
-              <a:t>난수</a:t>
-            </a:r>
-            <a:r>
-              <a:rPr sz="1100" spc="-10" dirty="0">
-                <a:solidFill>
-                  <a:srgbClr val="333333"/>
-                </a:solidFill>
-                <a:latin typeface="Gulim"/>
-                <a:cs typeface="Gulim"/>
-              </a:rPr>
-              <a:t> </a:t>
-            </a:r>
-            <a:r>
-              <a:rPr sz="1100" spc="-25" dirty="0">
-                <a:solidFill>
-                  <a:srgbClr val="333333"/>
-                </a:solidFill>
-                <a:latin typeface="Gulim"/>
-                <a:cs typeface="Gulim"/>
-              </a:rPr>
-              <a:t>기능을 </a:t>
-            </a:r>
-            <a:r>
-              <a:rPr sz="1100" dirty="0">
-                <a:solidFill>
-                  <a:srgbClr val="333333"/>
-                </a:solidFill>
-                <a:latin typeface="Gulim"/>
-                <a:cs typeface="Gulim"/>
-              </a:rPr>
-              <a:t>완벽히</a:t>
-            </a:r>
-            <a:r>
-              <a:rPr sz="1100" spc="-20" dirty="0">
-                <a:solidFill>
-                  <a:srgbClr val="333333"/>
-                </a:solidFill>
-                <a:latin typeface="Gulim"/>
-                <a:cs typeface="Gulim"/>
-              </a:rPr>
-              <a:t> </a:t>
-            </a:r>
-            <a:r>
-              <a:rPr sz="1100" dirty="0">
-                <a:solidFill>
-                  <a:srgbClr val="333333"/>
-                </a:solidFill>
-                <a:latin typeface="Gulim"/>
-                <a:cs typeface="Gulim"/>
-              </a:rPr>
-              <a:t>불러올</a:t>
-            </a:r>
-            <a:r>
-              <a:rPr sz="1100" spc="-20" dirty="0">
-                <a:solidFill>
-                  <a:srgbClr val="333333"/>
-                </a:solidFill>
-                <a:latin typeface="Gulim"/>
-                <a:cs typeface="Gulim"/>
-              </a:rPr>
-              <a:t> </a:t>
-            </a:r>
-            <a:r>
-              <a:rPr sz="1100" dirty="0">
-                <a:solidFill>
-                  <a:srgbClr val="333333"/>
-                </a:solidFill>
-                <a:latin typeface="Gulim"/>
-                <a:cs typeface="Gulim"/>
-              </a:rPr>
-              <a:t>수</a:t>
-            </a:r>
-            <a:r>
-              <a:rPr sz="1100" spc="-10" dirty="0">
-                <a:solidFill>
-                  <a:srgbClr val="333333"/>
-                </a:solidFill>
-                <a:latin typeface="Gulim"/>
-                <a:cs typeface="Gulim"/>
-              </a:rPr>
-              <a:t> </a:t>
-            </a:r>
-            <a:r>
-              <a:rPr sz="1100" spc="-25" dirty="0">
-                <a:solidFill>
-                  <a:srgbClr val="333333"/>
-                </a:solidFill>
-                <a:latin typeface="Gulim"/>
-                <a:cs typeface="Gulim"/>
-              </a:rPr>
-              <a:t>있었다</a:t>
-            </a:r>
-            <a:endParaRPr sz="1100" dirty="0">
-              <a:latin typeface="Gulim"/>
-              <a:cs typeface="Gulim"/>
-            </a:endParaRPr>
-          </a:p>
-        </p:txBody>
-      </p:sp>
-      <p:grpSp>
-        <p:nvGrpSpPr>
-          <p:cNvPr id="29" name="object 29"/>
-          <p:cNvGrpSpPr/>
-          <p:nvPr/>
-        </p:nvGrpSpPr>
-        <p:grpSpPr>
-          <a:xfrm>
-            <a:off x="6907024" y="3187483"/>
-            <a:ext cx="4572000" cy="1266825"/>
-            <a:chOff x="7152893" y="3198114"/>
-            <a:chExt cx="4572000" cy="1266825"/>
-          </a:xfrm>
-        </p:grpSpPr>
-        <p:sp>
-          <p:nvSpPr>
-            <p:cNvPr id="30" name="object 30"/>
-            <p:cNvSpPr/>
-            <p:nvPr/>
-          </p:nvSpPr>
-          <p:spPr>
-            <a:xfrm>
-              <a:off x="7152893" y="3198114"/>
-              <a:ext cx="4572000" cy="1266825"/>
-            </a:xfrm>
-            <a:custGeom>
-              <a:avLst/>
-              <a:gdLst/>
-              <a:ahLst/>
-              <a:cxnLst/>
-              <a:rect l="l" t="t" r="r" b="b"/>
-              <a:pathLst>
-                <a:path w="4572000" h="1266825">
-                  <a:moveTo>
-                    <a:pt x="4572000" y="0"/>
-                  </a:moveTo>
-                  <a:lnTo>
-                    <a:pt x="0" y="0"/>
-                  </a:lnTo>
-                  <a:lnTo>
-                    <a:pt x="0" y="1266444"/>
-                  </a:lnTo>
-                  <a:lnTo>
-                    <a:pt x="4572000" y="1266444"/>
-                  </a:lnTo>
-                  <a:lnTo>
-                    <a:pt x="4572000" y="0"/>
-                  </a:lnTo>
-                  <a:close/>
-                </a:path>
-              </a:pathLst>
-            </a:custGeom>
-            <a:solidFill>
-              <a:srgbClr val="FFFFFF"/>
-            </a:solidFill>
-          </p:spPr>
-          <p:txBody>
-            <a:bodyPr wrap="square" lIns="0" tIns="0" rIns="0" bIns="0" rtlCol="0"/>
-            <a:lstStyle/>
-            <a:p>
-              <a:endParaRPr/>
-            </a:p>
-          </p:txBody>
-        </p:sp>
-        <p:sp>
-          <p:nvSpPr>
-            <p:cNvPr id="31" name="object 31"/>
-            <p:cNvSpPr/>
-            <p:nvPr/>
-          </p:nvSpPr>
-          <p:spPr>
-            <a:xfrm>
-              <a:off x="7409687" y="3544824"/>
-              <a:ext cx="571500" cy="571500"/>
-            </a:xfrm>
-            <a:custGeom>
-              <a:avLst/>
-              <a:gdLst/>
-              <a:ahLst/>
-              <a:cxnLst/>
-              <a:rect l="l" t="t" r="r" b="b"/>
-              <a:pathLst>
-                <a:path w="571500" h="571500">
-                  <a:moveTo>
-                    <a:pt x="285750" y="0"/>
-                  </a:moveTo>
-                  <a:lnTo>
-                    <a:pt x="239388" y="3738"/>
-                  </a:lnTo>
-                  <a:lnTo>
-                    <a:pt x="195413" y="14563"/>
-                  </a:lnTo>
-                  <a:lnTo>
-                    <a:pt x="154411" y="31886"/>
-                  </a:lnTo>
-                  <a:lnTo>
-                    <a:pt x="116970" y="55120"/>
-                  </a:lnTo>
-                  <a:lnTo>
-                    <a:pt x="83677" y="83677"/>
-                  </a:lnTo>
-                  <a:lnTo>
-                    <a:pt x="55120" y="116970"/>
-                  </a:lnTo>
-                  <a:lnTo>
-                    <a:pt x="31886" y="154411"/>
-                  </a:lnTo>
-                  <a:lnTo>
-                    <a:pt x="14563" y="195413"/>
-                  </a:lnTo>
-                  <a:lnTo>
-                    <a:pt x="3738" y="239388"/>
-                  </a:lnTo>
-                  <a:lnTo>
-                    <a:pt x="0" y="285750"/>
-                  </a:lnTo>
-                  <a:lnTo>
-                    <a:pt x="3738" y="332111"/>
-                  </a:lnTo>
-                  <a:lnTo>
-                    <a:pt x="14563" y="376086"/>
-                  </a:lnTo>
-                  <a:lnTo>
-                    <a:pt x="31886" y="417088"/>
-                  </a:lnTo>
-                  <a:lnTo>
-                    <a:pt x="55120" y="454529"/>
-                  </a:lnTo>
-                  <a:lnTo>
-                    <a:pt x="83677" y="487822"/>
-                  </a:lnTo>
-                  <a:lnTo>
-                    <a:pt x="116970" y="516379"/>
-                  </a:lnTo>
-                  <a:lnTo>
-                    <a:pt x="154411" y="539613"/>
-                  </a:lnTo>
-                  <a:lnTo>
-                    <a:pt x="195413" y="556936"/>
-                  </a:lnTo>
-                  <a:lnTo>
-                    <a:pt x="239388" y="567761"/>
-                  </a:lnTo>
-                  <a:lnTo>
-                    <a:pt x="285750" y="571500"/>
-                  </a:lnTo>
-                  <a:lnTo>
-                    <a:pt x="332111" y="567761"/>
-                  </a:lnTo>
-                  <a:lnTo>
-                    <a:pt x="376086" y="556936"/>
-                  </a:lnTo>
-                  <a:lnTo>
-                    <a:pt x="417088" y="539613"/>
-                  </a:lnTo>
-                  <a:lnTo>
-                    <a:pt x="454529" y="516379"/>
-                  </a:lnTo>
-                  <a:lnTo>
-                    <a:pt x="487822" y="487822"/>
-                  </a:lnTo>
-                  <a:lnTo>
-                    <a:pt x="516379" y="454529"/>
-                  </a:lnTo>
-                  <a:lnTo>
-                    <a:pt x="539613" y="417088"/>
-                  </a:lnTo>
-                  <a:lnTo>
-                    <a:pt x="556936" y="376086"/>
-                  </a:lnTo>
-                  <a:lnTo>
-                    <a:pt x="567761" y="332111"/>
-                  </a:lnTo>
-                  <a:lnTo>
-                    <a:pt x="571500" y="285750"/>
-                  </a:lnTo>
-                  <a:lnTo>
-                    <a:pt x="567761" y="239388"/>
-                  </a:lnTo>
-                  <a:lnTo>
-                    <a:pt x="556936" y="195413"/>
-                  </a:lnTo>
-                  <a:lnTo>
-                    <a:pt x="539613" y="154411"/>
-                  </a:lnTo>
-                  <a:lnTo>
-                    <a:pt x="516379" y="116970"/>
-                  </a:lnTo>
-                  <a:lnTo>
-                    <a:pt x="487822" y="83677"/>
-                  </a:lnTo>
-                  <a:lnTo>
-                    <a:pt x="454529" y="55120"/>
-                  </a:lnTo>
-                  <a:lnTo>
-                    <a:pt x="417088" y="31886"/>
-                  </a:lnTo>
-                  <a:lnTo>
-                    <a:pt x="376086" y="14563"/>
-                  </a:lnTo>
-                  <a:lnTo>
-                    <a:pt x="332111" y="3738"/>
-                  </a:lnTo>
-                  <a:lnTo>
-                    <a:pt x="285750" y="0"/>
-                  </a:lnTo>
-                  <a:close/>
-                </a:path>
-              </a:pathLst>
-            </a:custGeom>
-            <a:solidFill>
-              <a:srgbClr val="4169E0"/>
-            </a:solidFill>
-          </p:spPr>
-          <p:txBody>
-            <a:bodyPr wrap="square" lIns="0" tIns="0" rIns="0" bIns="0" rtlCol="0"/>
-            <a:lstStyle/>
-            <a:p>
-              <a:endParaRPr/>
-            </a:p>
-          </p:txBody>
-        </p:sp>
-        <p:pic>
-          <p:nvPicPr>
-            <p:cNvPr id="32" name="object 32" descr="gen-dedup-5d54f9a4d5ba0f3092846f8dce0a6696.png"/>
-            <p:cNvPicPr/>
-            <p:nvPr/>
-          </p:nvPicPr>
-          <p:blipFill>
-            <a:blip r:embed="rId5" cstate="print"/>
-            <a:stretch>
-              <a:fillRect/>
-            </a:stretch>
-          </p:blipFill>
-          <p:spPr>
-            <a:xfrm>
-              <a:off x="7562087" y="3698748"/>
-              <a:ext cx="266700" cy="266700"/>
-            </a:xfrm>
-            <a:prstGeom prst="rect">
-              <a:avLst/>
-            </a:prstGeom>
-          </p:spPr>
-        </p:pic>
-      </p:grpSp>
-      <p:sp>
-        <p:nvSpPr>
-          <p:cNvPr id="33" name="object 33"/>
-          <p:cNvSpPr txBox="1"/>
-          <p:nvPr/>
-        </p:nvSpPr>
-        <p:spPr>
-          <a:xfrm>
-            <a:off x="6907024" y="3187483"/>
-            <a:ext cx="4572000" cy="1266825"/>
-          </a:xfrm>
-          <a:prstGeom prst="rect">
-            <a:avLst/>
-          </a:prstGeom>
-          <a:ln w="25400">
-            <a:solidFill>
-              <a:srgbClr val="C0C0C0"/>
-            </a:solidFill>
-          </a:ln>
-        </p:spPr>
-        <p:txBody>
-          <a:bodyPr vert="horz" wrap="square" lIns="0" tIns="85725" rIns="0" bIns="0" rtlCol="0">
-            <a:spAutoFit/>
-          </a:bodyPr>
-          <a:lstStyle/>
-          <a:p>
-            <a:pPr>
-              <a:lnSpc>
-                <a:spcPct val="100000"/>
-              </a:lnSpc>
-              <a:spcBef>
-                <a:spcPts val="675"/>
-              </a:spcBef>
-            </a:pPr>
-            <a:endParaRPr sz="1300">
-              <a:latin typeface="Times New Roman"/>
-              <a:cs typeface="Times New Roman"/>
-            </a:endParaRPr>
-          </a:p>
-          <a:p>
-            <a:pPr marL="1019175">
-              <a:lnSpc>
-                <a:spcPct val="100000"/>
-              </a:lnSpc>
-            </a:pPr>
-            <a:r>
-              <a:rPr sz="1300" b="1" dirty="0">
-                <a:solidFill>
-                  <a:srgbClr val="000080"/>
-                </a:solidFill>
-                <a:latin typeface="Gulim"/>
-                <a:cs typeface="Gulim"/>
-              </a:rPr>
-              <a:t>64비트</a:t>
-            </a:r>
-            <a:r>
-              <a:rPr sz="1300" b="1" spc="-50" dirty="0">
-                <a:solidFill>
-                  <a:srgbClr val="000080"/>
-                </a:solidFill>
-                <a:latin typeface="Gulim"/>
-                <a:cs typeface="Gulim"/>
-              </a:rPr>
-              <a:t> </a:t>
-            </a:r>
-            <a:r>
-              <a:rPr sz="1300" b="1" dirty="0">
-                <a:solidFill>
-                  <a:srgbClr val="000080"/>
-                </a:solidFill>
-                <a:latin typeface="Gulim"/>
-                <a:cs typeface="Gulim"/>
-              </a:rPr>
-              <a:t>BaseSeed</a:t>
-            </a:r>
-            <a:r>
-              <a:rPr sz="1300" b="1" spc="-45" dirty="0">
-                <a:solidFill>
-                  <a:srgbClr val="000080"/>
-                </a:solidFill>
-                <a:latin typeface="Gulim"/>
-                <a:cs typeface="Gulim"/>
-              </a:rPr>
-              <a:t> </a:t>
-            </a:r>
-            <a:r>
-              <a:rPr sz="1300" b="1" spc="-25" dirty="0">
-                <a:solidFill>
-                  <a:srgbClr val="000080"/>
-                </a:solidFill>
-                <a:latin typeface="Gulim"/>
-                <a:cs typeface="Gulim"/>
-              </a:rPr>
-              <a:t>기반</a:t>
-            </a:r>
-            <a:endParaRPr sz="1300">
-              <a:latin typeface="Gulim"/>
-              <a:cs typeface="Gulim"/>
-            </a:endParaRPr>
-          </a:p>
-          <a:p>
-            <a:pPr marL="1019175" marR="395605">
-              <a:lnSpc>
-                <a:spcPts val="1250"/>
-              </a:lnSpc>
-              <a:spcBef>
-                <a:spcPts val="1350"/>
-              </a:spcBef>
-            </a:pPr>
-            <a:r>
-              <a:rPr sz="1100" dirty="0">
-                <a:solidFill>
-                  <a:srgbClr val="333333"/>
-                </a:solidFill>
-                <a:latin typeface="Gulim"/>
-                <a:cs typeface="Gulim"/>
-              </a:rPr>
-              <a:t>총</a:t>
-            </a:r>
-            <a:r>
-              <a:rPr sz="1100" spc="-20" dirty="0">
-                <a:solidFill>
-                  <a:srgbClr val="333333"/>
-                </a:solidFill>
-                <a:latin typeface="Gulim"/>
-                <a:cs typeface="Gulim"/>
-              </a:rPr>
-              <a:t> </a:t>
-            </a:r>
-            <a:r>
-              <a:rPr sz="1100" dirty="0">
-                <a:solidFill>
-                  <a:srgbClr val="333333"/>
-                </a:solidFill>
-                <a:latin typeface="Gulim"/>
-                <a:cs typeface="Gulim"/>
-              </a:rPr>
-              <a:t>64비트</a:t>
-            </a:r>
-            <a:r>
-              <a:rPr sz="1100" spc="-20" dirty="0">
-                <a:solidFill>
-                  <a:srgbClr val="333333"/>
-                </a:solidFill>
-                <a:latin typeface="Gulim"/>
-                <a:cs typeface="Gulim"/>
-              </a:rPr>
-              <a:t> </a:t>
-            </a:r>
-            <a:r>
-              <a:rPr sz="1100" dirty="0">
-                <a:solidFill>
-                  <a:srgbClr val="333333"/>
-                </a:solidFill>
-                <a:latin typeface="Gulim"/>
-                <a:cs typeface="Gulim"/>
-              </a:rPr>
-              <a:t>단위의</a:t>
-            </a:r>
-            <a:r>
-              <a:rPr sz="1100" spc="-30" dirty="0">
-                <a:solidFill>
-                  <a:srgbClr val="333333"/>
-                </a:solidFill>
-                <a:latin typeface="Gulim"/>
-                <a:cs typeface="Gulim"/>
-              </a:rPr>
-              <a:t> </a:t>
-            </a:r>
-            <a:r>
-              <a:rPr sz="1100" dirty="0">
-                <a:solidFill>
-                  <a:srgbClr val="333333"/>
-                </a:solidFill>
-                <a:latin typeface="Gulim"/>
-                <a:cs typeface="Gulim"/>
-              </a:rPr>
-              <a:t>BaseSeed를</a:t>
-            </a:r>
-            <a:r>
-              <a:rPr sz="1100" spc="-20" dirty="0">
-                <a:solidFill>
-                  <a:srgbClr val="333333"/>
-                </a:solidFill>
-                <a:latin typeface="Gulim"/>
-                <a:cs typeface="Gulim"/>
-              </a:rPr>
-              <a:t> </a:t>
-            </a:r>
-            <a:r>
-              <a:rPr sz="1100" dirty="0">
-                <a:solidFill>
-                  <a:srgbClr val="333333"/>
-                </a:solidFill>
-                <a:latin typeface="Gulim"/>
-                <a:cs typeface="Gulim"/>
-              </a:rPr>
-              <a:t>이용하여</a:t>
-            </a:r>
-            <a:r>
-              <a:rPr sz="1100" spc="-30" dirty="0">
-                <a:solidFill>
-                  <a:srgbClr val="333333"/>
-                </a:solidFill>
-                <a:latin typeface="Gulim"/>
-                <a:cs typeface="Gulim"/>
-              </a:rPr>
-              <a:t> </a:t>
-            </a:r>
-            <a:r>
-              <a:rPr sz="1100" spc="-20" dirty="0">
-                <a:solidFill>
-                  <a:srgbClr val="333333"/>
-                </a:solidFill>
-                <a:latin typeface="Gulim"/>
-                <a:cs typeface="Gulim"/>
-              </a:rPr>
-              <a:t>안정적인 </a:t>
-            </a:r>
-            <a:r>
-              <a:rPr sz="1100" dirty="0">
-                <a:solidFill>
-                  <a:srgbClr val="333333"/>
-                </a:solidFill>
-                <a:latin typeface="Gulim"/>
-                <a:cs typeface="Gulim"/>
-              </a:rPr>
-              <a:t>세이브</a:t>
-            </a:r>
-            <a:r>
-              <a:rPr sz="1100" spc="-20" dirty="0">
-                <a:solidFill>
-                  <a:srgbClr val="333333"/>
-                </a:solidFill>
-                <a:latin typeface="Gulim"/>
-                <a:cs typeface="Gulim"/>
-              </a:rPr>
-              <a:t> </a:t>
-            </a:r>
-            <a:r>
-              <a:rPr sz="1100" dirty="0">
-                <a:solidFill>
-                  <a:srgbClr val="333333"/>
-                </a:solidFill>
-                <a:latin typeface="Gulim"/>
-                <a:cs typeface="Gulim"/>
-              </a:rPr>
-              <a:t>및</a:t>
-            </a:r>
-            <a:r>
-              <a:rPr sz="1100" spc="-10" dirty="0">
-                <a:solidFill>
-                  <a:srgbClr val="333333"/>
-                </a:solidFill>
-                <a:latin typeface="Gulim"/>
-                <a:cs typeface="Gulim"/>
-              </a:rPr>
-              <a:t> </a:t>
-            </a:r>
-            <a:r>
-              <a:rPr sz="1100" dirty="0">
-                <a:solidFill>
-                  <a:srgbClr val="333333"/>
-                </a:solidFill>
-                <a:latin typeface="Gulim"/>
-                <a:cs typeface="Gulim"/>
-              </a:rPr>
-              <a:t>로드가</a:t>
-            </a:r>
-            <a:r>
-              <a:rPr sz="1100" spc="-20" dirty="0">
-                <a:solidFill>
-                  <a:srgbClr val="333333"/>
-                </a:solidFill>
-                <a:latin typeface="Gulim"/>
-                <a:cs typeface="Gulim"/>
-              </a:rPr>
-              <a:t> </a:t>
-            </a:r>
-            <a:r>
-              <a:rPr sz="1100" spc="-10" dirty="0">
-                <a:solidFill>
-                  <a:srgbClr val="333333"/>
-                </a:solidFill>
-                <a:latin typeface="Gulim"/>
-                <a:cs typeface="Gulim"/>
-              </a:rPr>
-              <a:t>가능해졌다</a:t>
-            </a:r>
-            <a:endParaRPr sz="1100">
-              <a:latin typeface="Gulim"/>
-              <a:cs typeface="Gulim"/>
-            </a:endParaRPr>
-          </a:p>
-        </p:txBody>
-      </p:sp>
-      <p:grpSp>
-        <p:nvGrpSpPr>
-          <p:cNvPr id="34" name="object 34"/>
-          <p:cNvGrpSpPr/>
-          <p:nvPr/>
-        </p:nvGrpSpPr>
-        <p:grpSpPr>
-          <a:xfrm>
-            <a:off x="6907024" y="4763298"/>
-            <a:ext cx="4572000" cy="1266825"/>
-            <a:chOff x="7152893" y="4773929"/>
-            <a:chExt cx="4572000" cy="1266825"/>
-          </a:xfrm>
-        </p:grpSpPr>
-        <p:sp>
-          <p:nvSpPr>
-            <p:cNvPr id="35" name="object 35"/>
-            <p:cNvSpPr/>
-            <p:nvPr/>
-          </p:nvSpPr>
-          <p:spPr>
-            <a:xfrm>
-              <a:off x="7152893" y="4773929"/>
-              <a:ext cx="4572000" cy="1266825"/>
-            </a:xfrm>
-            <a:custGeom>
-              <a:avLst/>
-              <a:gdLst/>
-              <a:ahLst/>
-              <a:cxnLst/>
-              <a:rect l="l" t="t" r="r" b="b"/>
-              <a:pathLst>
-                <a:path w="4572000" h="1266825">
-                  <a:moveTo>
-                    <a:pt x="4572000" y="0"/>
-                  </a:moveTo>
-                  <a:lnTo>
-                    <a:pt x="0" y="0"/>
-                  </a:lnTo>
-                  <a:lnTo>
-                    <a:pt x="0" y="1266444"/>
-                  </a:lnTo>
-                  <a:lnTo>
-                    <a:pt x="4572000" y="1266444"/>
-                  </a:lnTo>
-                  <a:lnTo>
-                    <a:pt x="4572000" y="0"/>
-                  </a:lnTo>
-                  <a:close/>
-                </a:path>
-              </a:pathLst>
-            </a:custGeom>
-            <a:solidFill>
-              <a:srgbClr val="FFFFFF"/>
-            </a:solidFill>
-          </p:spPr>
-          <p:txBody>
-            <a:bodyPr wrap="square" lIns="0" tIns="0" rIns="0" bIns="0" rtlCol="0"/>
-            <a:lstStyle/>
-            <a:p>
-              <a:endParaRPr/>
-            </a:p>
-          </p:txBody>
-        </p:sp>
-        <p:sp>
-          <p:nvSpPr>
-            <p:cNvPr id="36" name="object 36"/>
-            <p:cNvSpPr/>
-            <p:nvPr/>
-          </p:nvSpPr>
-          <p:spPr>
-            <a:xfrm>
-              <a:off x="7409687" y="5120639"/>
-              <a:ext cx="571500" cy="571500"/>
-            </a:xfrm>
-            <a:custGeom>
-              <a:avLst/>
-              <a:gdLst/>
-              <a:ahLst/>
-              <a:cxnLst/>
-              <a:rect l="l" t="t" r="r" b="b"/>
-              <a:pathLst>
-                <a:path w="571500" h="571500">
-                  <a:moveTo>
-                    <a:pt x="285750" y="0"/>
-                  </a:moveTo>
-                  <a:lnTo>
-                    <a:pt x="239388" y="3738"/>
-                  </a:lnTo>
-                  <a:lnTo>
-                    <a:pt x="195413" y="14563"/>
-                  </a:lnTo>
-                  <a:lnTo>
-                    <a:pt x="154411" y="31886"/>
-                  </a:lnTo>
-                  <a:lnTo>
-                    <a:pt x="116970" y="55120"/>
-                  </a:lnTo>
-                  <a:lnTo>
-                    <a:pt x="83677" y="83677"/>
-                  </a:lnTo>
-                  <a:lnTo>
-                    <a:pt x="55120" y="116970"/>
-                  </a:lnTo>
-                  <a:lnTo>
-                    <a:pt x="31886" y="154411"/>
-                  </a:lnTo>
-                  <a:lnTo>
-                    <a:pt x="14563" y="195413"/>
-                  </a:lnTo>
-                  <a:lnTo>
-                    <a:pt x="3738" y="239388"/>
-                  </a:lnTo>
-                  <a:lnTo>
-                    <a:pt x="0" y="285750"/>
-                  </a:lnTo>
-                  <a:lnTo>
-                    <a:pt x="3738" y="332111"/>
-                  </a:lnTo>
-                  <a:lnTo>
-                    <a:pt x="14563" y="376086"/>
-                  </a:lnTo>
-                  <a:lnTo>
-                    <a:pt x="31886" y="417088"/>
-                  </a:lnTo>
-                  <a:lnTo>
-                    <a:pt x="55120" y="454529"/>
-                  </a:lnTo>
-                  <a:lnTo>
-                    <a:pt x="83677" y="487822"/>
-                  </a:lnTo>
-                  <a:lnTo>
-                    <a:pt x="116970" y="516379"/>
-                  </a:lnTo>
-                  <a:lnTo>
-                    <a:pt x="154411" y="539613"/>
-                  </a:lnTo>
-                  <a:lnTo>
-                    <a:pt x="195413" y="556936"/>
-                  </a:lnTo>
-                  <a:lnTo>
-                    <a:pt x="239388" y="567761"/>
-                  </a:lnTo>
-                  <a:lnTo>
-                    <a:pt x="285750" y="571500"/>
-                  </a:lnTo>
-                  <a:lnTo>
-                    <a:pt x="332111" y="567761"/>
-                  </a:lnTo>
-                  <a:lnTo>
-                    <a:pt x="376086" y="556936"/>
-                  </a:lnTo>
-                  <a:lnTo>
-                    <a:pt x="417088" y="539613"/>
-                  </a:lnTo>
-                  <a:lnTo>
-                    <a:pt x="454529" y="516379"/>
-                  </a:lnTo>
-                  <a:lnTo>
-                    <a:pt x="487822" y="487822"/>
-                  </a:lnTo>
-                  <a:lnTo>
-                    <a:pt x="516379" y="454529"/>
-                  </a:lnTo>
-                  <a:lnTo>
-                    <a:pt x="539613" y="417088"/>
-                  </a:lnTo>
-                  <a:lnTo>
-                    <a:pt x="556936" y="376086"/>
-                  </a:lnTo>
-                  <a:lnTo>
-                    <a:pt x="567761" y="332111"/>
-                  </a:lnTo>
-                  <a:lnTo>
-                    <a:pt x="571500" y="285750"/>
-                  </a:lnTo>
-                  <a:lnTo>
-                    <a:pt x="567761" y="239388"/>
-                  </a:lnTo>
-                  <a:lnTo>
-                    <a:pt x="556936" y="195413"/>
-                  </a:lnTo>
-                  <a:lnTo>
-                    <a:pt x="539613" y="154411"/>
-                  </a:lnTo>
-                  <a:lnTo>
-                    <a:pt x="516379" y="116970"/>
-                  </a:lnTo>
-                  <a:lnTo>
-                    <a:pt x="487822" y="83677"/>
-                  </a:lnTo>
-                  <a:lnTo>
-                    <a:pt x="454529" y="55120"/>
-                  </a:lnTo>
-                  <a:lnTo>
-                    <a:pt x="417088" y="31886"/>
-                  </a:lnTo>
-                  <a:lnTo>
-                    <a:pt x="376086" y="14563"/>
-                  </a:lnTo>
-                  <a:lnTo>
-                    <a:pt x="332111" y="3738"/>
-                  </a:lnTo>
-                  <a:lnTo>
-                    <a:pt x="285750" y="0"/>
-                  </a:lnTo>
-                  <a:close/>
-                </a:path>
-              </a:pathLst>
-            </a:custGeom>
-            <a:solidFill>
-              <a:srgbClr val="218A21"/>
-            </a:solidFill>
-          </p:spPr>
-          <p:txBody>
-            <a:bodyPr wrap="square" lIns="0" tIns="0" rIns="0" bIns="0" rtlCol="0"/>
-            <a:lstStyle/>
-            <a:p>
-              <a:endParaRPr/>
-            </a:p>
-          </p:txBody>
-        </p:sp>
-        <p:pic>
-          <p:nvPicPr>
-            <p:cNvPr id="37" name="object 37" descr="gen-dedup-cd15f8ad2427af8d86d4ff1e0b552387.png"/>
-            <p:cNvPicPr/>
-            <p:nvPr/>
-          </p:nvPicPr>
-          <p:blipFill>
-            <a:blip r:embed="rId6" cstate="print"/>
-            <a:stretch>
-              <a:fillRect/>
-            </a:stretch>
-          </p:blipFill>
-          <p:spPr>
-            <a:xfrm>
-              <a:off x="7595361" y="5273039"/>
-              <a:ext cx="200025" cy="268224"/>
-            </a:xfrm>
-            <a:prstGeom prst="rect">
-              <a:avLst/>
-            </a:prstGeom>
-          </p:spPr>
-        </p:pic>
-      </p:grpSp>
-      <p:sp>
-        <p:nvSpPr>
-          <p:cNvPr id="38" name="object 38"/>
-          <p:cNvSpPr txBox="1"/>
-          <p:nvPr/>
-        </p:nvSpPr>
-        <p:spPr>
-          <a:xfrm>
-            <a:off x="6907024" y="4763298"/>
-            <a:ext cx="4572000" cy="1266825"/>
-          </a:xfrm>
-          <a:prstGeom prst="rect">
-            <a:avLst/>
-          </a:prstGeom>
-          <a:ln w="25400">
-            <a:solidFill>
-              <a:srgbClr val="C0C0C0"/>
-            </a:solidFill>
-          </a:ln>
-        </p:spPr>
-        <p:txBody>
-          <a:bodyPr vert="horz" wrap="square" lIns="0" tIns="85725" rIns="0" bIns="0" rtlCol="0">
-            <a:spAutoFit/>
-          </a:bodyPr>
-          <a:lstStyle/>
-          <a:p>
-            <a:pPr>
-              <a:lnSpc>
-                <a:spcPct val="100000"/>
-              </a:lnSpc>
-              <a:spcBef>
-                <a:spcPts val="675"/>
-              </a:spcBef>
-            </a:pPr>
-            <a:endParaRPr sz="1300">
-              <a:latin typeface="Times New Roman"/>
-              <a:cs typeface="Times New Roman"/>
-            </a:endParaRPr>
-          </a:p>
-          <a:p>
-            <a:pPr marL="1019175">
-              <a:lnSpc>
-                <a:spcPct val="100000"/>
-              </a:lnSpc>
-            </a:pPr>
-            <a:r>
-              <a:rPr sz="1300" b="1" dirty="0">
-                <a:solidFill>
-                  <a:srgbClr val="000080"/>
-                </a:solidFill>
-                <a:latin typeface="Gulim"/>
-                <a:cs typeface="Gulim"/>
-              </a:rPr>
-              <a:t>대용량</a:t>
-            </a:r>
-            <a:r>
-              <a:rPr sz="1300" b="1" spc="-35" dirty="0">
-                <a:solidFill>
-                  <a:srgbClr val="000080"/>
-                </a:solidFill>
-                <a:latin typeface="Gulim"/>
-                <a:cs typeface="Gulim"/>
-              </a:rPr>
-              <a:t> </a:t>
-            </a:r>
-            <a:r>
-              <a:rPr sz="1300" b="1" dirty="0">
-                <a:solidFill>
-                  <a:srgbClr val="000080"/>
-                </a:solidFill>
-                <a:latin typeface="Gulim"/>
-                <a:cs typeface="Gulim"/>
-              </a:rPr>
-              <a:t>Json</a:t>
-            </a:r>
-            <a:r>
-              <a:rPr sz="1300" b="1" spc="-30" dirty="0">
-                <a:solidFill>
-                  <a:srgbClr val="000080"/>
-                </a:solidFill>
-                <a:latin typeface="Gulim"/>
-                <a:cs typeface="Gulim"/>
-              </a:rPr>
-              <a:t> </a:t>
-            </a:r>
-            <a:r>
-              <a:rPr sz="1300" b="1" dirty="0">
-                <a:solidFill>
-                  <a:srgbClr val="000080"/>
-                </a:solidFill>
-                <a:latin typeface="Gulim"/>
-                <a:cs typeface="Gulim"/>
-              </a:rPr>
-              <a:t>저장</a:t>
-            </a:r>
-            <a:r>
-              <a:rPr sz="1300" b="1" spc="-20" dirty="0">
-                <a:solidFill>
-                  <a:srgbClr val="000080"/>
-                </a:solidFill>
-                <a:latin typeface="Gulim"/>
-                <a:cs typeface="Gulim"/>
-              </a:rPr>
-              <a:t> </a:t>
-            </a:r>
-            <a:r>
-              <a:rPr sz="1300" b="1" spc="-25" dirty="0">
-                <a:solidFill>
-                  <a:srgbClr val="000080"/>
-                </a:solidFill>
-                <a:latin typeface="Gulim"/>
-                <a:cs typeface="Gulim"/>
-              </a:rPr>
-              <a:t>최소화</a:t>
-            </a:r>
-            <a:endParaRPr sz="1300">
-              <a:latin typeface="Gulim"/>
-              <a:cs typeface="Gulim"/>
-            </a:endParaRPr>
-          </a:p>
-          <a:p>
-            <a:pPr marL="1019175">
-              <a:lnSpc>
-                <a:spcPts val="1285"/>
-              </a:lnSpc>
-              <a:spcBef>
-                <a:spcPts val="1240"/>
-              </a:spcBef>
-            </a:pPr>
-            <a:r>
-              <a:rPr sz="1100" dirty="0">
-                <a:solidFill>
-                  <a:srgbClr val="333333"/>
-                </a:solidFill>
-                <a:latin typeface="Gulim"/>
-                <a:cs typeface="Gulim"/>
-              </a:rPr>
-              <a:t>일일이</a:t>
-            </a:r>
-            <a:r>
-              <a:rPr sz="1100" spc="-40" dirty="0">
-                <a:solidFill>
-                  <a:srgbClr val="333333"/>
-                </a:solidFill>
-                <a:latin typeface="Gulim"/>
-                <a:cs typeface="Gulim"/>
-              </a:rPr>
-              <a:t> </a:t>
-            </a:r>
-            <a:r>
-              <a:rPr sz="1100" dirty="0">
-                <a:solidFill>
-                  <a:srgbClr val="333333"/>
-                </a:solidFill>
-                <a:latin typeface="Gulim"/>
-                <a:cs typeface="Gulim"/>
-              </a:rPr>
-              <a:t>데이터를</a:t>
-            </a:r>
-            <a:r>
-              <a:rPr sz="1100" spc="-40" dirty="0">
-                <a:solidFill>
-                  <a:srgbClr val="333333"/>
-                </a:solidFill>
-                <a:latin typeface="Gulim"/>
-                <a:cs typeface="Gulim"/>
-              </a:rPr>
-              <a:t> </a:t>
-            </a:r>
-            <a:r>
-              <a:rPr sz="1100" dirty="0">
-                <a:solidFill>
-                  <a:srgbClr val="333333"/>
-                </a:solidFill>
-                <a:latin typeface="Gulim"/>
-                <a:cs typeface="Gulim"/>
-              </a:rPr>
-              <a:t>저장해서</a:t>
-            </a:r>
-            <a:r>
-              <a:rPr sz="1100" spc="-35" dirty="0">
-                <a:solidFill>
-                  <a:srgbClr val="333333"/>
-                </a:solidFill>
-                <a:latin typeface="Gulim"/>
-                <a:cs typeface="Gulim"/>
-              </a:rPr>
-              <a:t> </a:t>
-            </a:r>
-            <a:r>
-              <a:rPr sz="1100" dirty="0">
-                <a:solidFill>
-                  <a:srgbClr val="333333"/>
-                </a:solidFill>
-                <a:latin typeface="Gulim"/>
-                <a:cs typeface="Gulim"/>
-              </a:rPr>
-              <a:t>Json</a:t>
-            </a:r>
-            <a:r>
-              <a:rPr sz="1100" spc="-40" dirty="0">
-                <a:solidFill>
-                  <a:srgbClr val="333333"/>
-                </a:solidFill>
-                <a:latin typeface="Gulim"/>
-                <a:cs typeface="Gulim"/>
-              </a:rPr>
-              <a:t> </a:t>
-            </a:r>
-            <a:r>
-              <a:rPr sz="1100" dirty="0">
-                <a:solidFill>
-                  <a:srgbClr val="333333"/>
-                </a:solidFill>
-                <a:latin typeface="Gulim"/>
-                <a:cs typeface="Gulim"/>
-              </a:rPr>
-              <a:t>파일이</a:t>
-            </a:r>
-            <a:r>
-              <a:rPr sz="1100" spc="-35" dirty="0">
-                <a:solidFill>
-                  <a:srgbClr val="333333"/>
-                </a:solidFill>
-                <a:latin typeface="Gulim"/>
-                <a:cs typeface="Gulim"/>
-              </a:rPr>
-              <a:t> </a:t>
-            </a:r>
-            <a:r>
-              <a:rPr sz="1100" dirty="0">
-                <a:solidFill>
-                  <a:srgbClr val="333333"/>
-                </a:solidFill>
-                <a:latin typeface="Gulim"/>
-                <a:cs typeface="Gulim"/>
-              </a:rPr>
-              <a:t>커지고</a:t>
-            </a:r>
-            <a:r>
-              <a:rPr sz="1100" spc="-20" dirty="0">
-                <a:solidFill>
-                  <a:srgbClr val="333333"/>
-                </a:solidFill>
-                <a:latin typeface="Gulim"/>
-                <a:cs typeface="Gulim"/>
-              </a:rPr>
-              <a:t> </a:t>
-            </a:r>
-            <a:r>
-              <a:rPr sz="1100" spc="-35" dirty="0">
-                <a:solidFill>
-                  <a:srgbClr val="333333"/>
-                </a:solidFill>
-                <a:latin typeface="Gulim"/>
-                <a:cs typeface="Gulim"/>
-              </a:rPr>
-              <a:t>관리</a:t>
-            </a:r>
-            <a:endParaRPr sz="1100">
-              <a:latin typeface="Gulim"/>
-              <a:cs typeface="Gulim"/>
-            </a:endParaRPr>
-          </a:p>
-          <a:p>
-            <a:pPr marL="1019175">
-              <a:lnSpc>
-                <a:spcPts val="1285"/>
-              </a:lnSpc>
-            </a:pPr>
-            <a:r>
-              <a:rPr sz="1100" dirty="0">
-                <a:solidFill>
-                  <a:srgbClr val="333333"/>
-                </a:solidFill>
-                <a:latin typeface="Gulim"/>
-                <a:cs typeface="Gulim"/>
-              </a:rPr>
-              <a:t>하기</a:t>
-            </a:r>
-            <a:r>
-              <a:rPr sz="1100" spc="-10" dirty="0">
-                <a:solidFill>
-                  <a:srgbClr val="333333"/>
-                </a:solidFill>
-                <a:latin typeface="Gulim"/>
-                <a:cs typeface="Gulim"/>
-              </a:rPr>
-              <a:t> </a:t>
-            </a:r>
-            <a:r>
-              <a:rPr sz="1100" dirty="0">
-                <a:solidFill>
-                  <a:srgbClr val="333333"/>
-                </a:solidFill>
-                <a:latin typeface="Gulim"/>
-                <a:cs typeface="Gulim"/>
-              </a:rPr>
-              <a:t>번거로워지는</a:t>
-            </a:r>
-            <a:r>
-              <a:rPr sz="1100" spc="-35" dirty="0">
-                <a:solidFill>
-                  <a:srgbClr val="333333"/>
-                </a:solidFill>
-                <a:latin typeface="Gulim"/>
-                <a:cs typeface="Gulim"/>
-              </a:rPr>
-              <a:t> </a:t>
-            </a:r>
-            <a:r>
-              <a:rPr sz="1100" dirty="0">
-                <a:solidFill>
-                  <a:srgbClr val="333333"/>
-                </a:solidFill>
-                <a:latin typeface="Gulim"/>
-                <a:cs typeface="Gulim"/>
-              </a:rPr>
-              <a:t>문제를</a:t>
-            </a:r>
-            <a:r>
-              <a:rPr sz="1100" spc="-20" dirty="0">
-                <a:solidFill>
-                  <a:srgbClr val="333333"/>
-                </a:solidFill>
-                <a:latin typeface="Gulim"/>
-                <a:cs typeface="Gulim"/>
-              </a:rPr>
-              <a:t> </a:t>
-            </a:r>
-            <a:r>
-              <a:rPr sz="1100" dirty="0">
-                <a:solidFill>
-                  <a:srgbClr val="333333"/>
-                </a:solidFill>
-                <a:latin typeface="Gulim"/>
-                <a:cs typeface="Gulim"/>
-              </a:rPr>
-              <a:t>완벽히</a:t>
-            </a:r>
-            <a:r>
-              <a:rPr sz="1100" spc="-20" dirty="0">
-                <a:solidFill>
-                  <a:srgbClr val="333333"/>
-                </a:solidFill>
-                <a:latin typeface="Gulim"/>
-                <a:cs typeface="Gulim"/>
-              </a:rPr>
-              <a:t> </a:t>
-            </a:r>
-            <a:r>
-              <a:rPr sz="1100" spc="-10" dirty="0">
-                <a:solidFill>
-                  <a:srgbClr val="333333"/>
-                </a:solidFill>
-                <a:latin typeface="Gulim"/>
-                <a:cs typeface="Gulim"/>
-              </a:rPr>
-              <a:t>예방가능하다.</a:t>
-            </a:r>
-            <a:endParaRPr sz="1100">
-              <a:latin typeface="Gulim"/>
-              <a:cs typeface="Gulim"/>
-            </a:endParaRPr>
-          </a:p>
-        </p:txBody>
-      </p:sp>
-      <p:grpSp>
-        <p:nvGrpSpPr>
-          <p:cNvPr id="39" name="object 39"/>
-          <p:cNvGrpSpPr/>
-          <p:nvPr/>
-        </p:nvGrpSpPr>
-        <p:grpSpPr>
-          <a:xfrm>
-            <a:off x="407922" y="2757167"/>
-            <a:ext cx="6069077" cy="3296285"/>
-            <a:chOff x="1225550" y="2755645"/>
-            <a:chExt cx="5836920" cy="3296285"/>
-          </a:xfrm>
-        </p:grpSpPr>
-        <p:sp>
-          <p:nvSpPr>
-            <p:cNvPr id="40" name="object 40"/>
-            <p:cNvSpPr/>
-            <p:nvPr/>
-          </p:nvSpPr>
-          <p:spPr>
-            <a:xfrm>
-              <a:off x="1238250" y="2768345"/>
-              <a:ext cx="5811520" cy="3270885"/>
-            </a:xfrm>
-            <a:custGeom>
-              <a:avLst/>
-              <a:gdLst/>
-              <a:ahLst/>
-              <a:cxnLst/>
-              <a:rect l="l" t="t" r="r" b="b"/>
-              <a:pathLst>
-                <a:path w="5811520" h="3270885">
-                  <a:moveTo>
-                    <a:pt x="5811011" y="0"/>
-                  </a:moveTo>
-                  <a:lnTo>
-                    <a:pt x="0" y="0"/>
-                  </a:lnTo>
-                  <a:lnTo>
-                    <a:pt x="0" y="3270504"/>
-                  </a:lnTo>
-                  <a:lnTo>
-                    <a:pt x="5811011" y="3270504"/>
-                  </a:lnTo>
-                  <a:lnTo>
-                    <a:pt x="5811011" y="0"/>
-                  </a:lnTo>
-                  <a:close/>
-                </a:path>
-              </a:pathLst>
-            </a:custGeom>
-            <a:solidFill>
-              <a:srgbClr val="000000"/>
-            </a:solidFill>
-          </p:spPr>
-          <p:txBody>
-            <a:bodyPr wrap="square" lIns="0" tIns="0" rIns="0" bIns="0" rtlCol="0"/>
-            <a:lstStyle/>
-            <a:p>
-              <a:endParaRPr/>
-            </a:p>
-          </p:txBody>
-        </p:sp>
-        <p:sp>
-          <p:nvSpPr>
-            <p:cNvPr id="41" name="object 41"/>
-            <p:cNvSpPr/>
-            <p:nvPr/>
-          </p:nvSpPr>
-          <p:spPr>
-            <a:xfrm>
-              <a:off x="1238250" y="2768345"/>
-              <a:ext cx="5811520" cy="3270885"/>
-            </a:xfrm>
-            <a:custGeom>
-              <a:avLst/>
-              <a:gdLst/>
-              <a:ahLst/>
-              <a:cxnLst/>
-              <a:rect l="l" t="t" r="r" b="b"/>
-              <a:pathLst>
-                <a:path w="5811520" h="3270885">
-                  <a:moveTo>
-                    <a:pt x="0" y="3270504"/>
-                  </a:moveTo>
-                  <a:lnTo>
-                    <a:pt x="5811011" y="3270504"/>
-                  </a:lnTo>
-                  <a:lnTo>
-                    <a:pt x="5811011" y="0"/>
-                  </a:lnTo>
-                  <a:lnTo>
-                    <a:pt x="0" y="0"/>
-                  </a:lnTo>
-                  <a:lnTo>
-                    <a:pt x="0" y="3270504"/>
-                  </a:lnTo>
-                  <a:close/>
-                </a:path>
-              </a:pathLst>
-            </a:custGeom>
-            <a:ln w="25400">
-              <a:solidFill>
-                <a:srgbClr val="C0C0C0"/>
-              </a:solidFill>
-            </a:ln>
-          </p:spPr>
-          <p:txBody>
-            <a:bodyPr wrap="square" lIns="0" tIns="0" rIns="0" bIns="0" rtlCol="0"/>
-            <a:lstStyle/>
-            <a:p>
-              <a:endParaRPr/>
-            </a:p>
-          </p:txBody>
-        </p:sp>
-      </p:grpSp>
-      <p:sp>
-        <p:nvSpPr>
-          <p:cNvPr id="42" name="object 42"/>
-          <p:cNvSpPr txBox="1"/>
-          <p:nvPr/>
-        </p:nvSpPr>
-        <p:spPr>
-          <a:xfrm>
-            <a:off x="2289300" y="2953255"/>
-            <a:ext cx="2134609" cy="212238"/>
-          </a:xfrm>
-          <a:prstGeom prst="rect">
-            <a:avLst/>
-          </a:prstGeom>
-        </p:spPr>
-        <p:txBody>
-          <a:bodyPr vert="horz" wrap="square" lIns="0" tIns="12065" rIns="0" bIns="0" rtlCol="0">
-            <a:spAutoFit/>
-          </a:bodyPr>
-          <a:lstStyle/>
-          <a:p>
-            <a:pPr marL="12700">
-              <a:lnSpc>
-                <a:spcPct val="100000"/>
-              </a:lnSpc>
-              <a:spcBef>
-                <a:spcPts val="95"/>
-              </a:spcBef>
-            </a:pPr>
-            <a:r>
-              <a:rPr sz="1300" b="1" spc="110" dirty="0">
-                <a:solidFill>
-                  <a:srgbClr val="86CEF9"/>
-                </a:solidFill>
-                <a:latin typeface="Gulim"/>
-                <a:cs typeface="Gulim"/>
-              </a:rPr>
-              <a:t>DATA</a:t>
-            </a:r>
-            <a:r>
-              <a:rPr sz="1300" b="1" spc="300" dirty="0">
-                <a:solidFill>
-                  <a:srgbClr val="86CEF9"/>
-                </a:solidFill>
-                <a:latin typeface="Gulim"/>
-                <a:cs typeface="Gulim"/>
-              </a:rPr>
-              <a:t> </a:t>
-            </a:r>
-            <a:r>
-              <a:rPr sz="1300" b="1" spc="125" dirty="0">
-                <a:solidFill>
-                  <a:srgbClr val="86CEF9"/>
-                </a:solidFill>
-                <a:latin typeface="Gulim"/>
-                <a:cs typeface="Gulim"/>
-              </a:rPr>
-              <a:t>ENCODING</a:t>
-            </a:r>
-            <a:r>
-              <a:rPr sz="1300" b="1" spc="285" dirty="0">
-                <a:solidFill>
-                  <a:srgbClr val="86CEF9"/>
-                </a:solidFill>
-                <a:latin typeface="Gulim"/>
-                <a:cs typeface="Gulim"/>
-              </a:rPr>
-              <a:t> </a:t>
-            </a:r>
-            <a:r>
-              <a:rPr sz="1300" b="1" spc="-25" dirty="0">
-                <a:solidFill>
-                  <a:srgbClr val="86CEF9"/>
-                </a:solidFill>
-                <a:latin typeface="Gulim"/>
-                <a:cs typeface="Gulim"/>
-              </a:rPr>
-              <a:t>MAP</a:t>
-            </a:r>
-            <a:endParaRPr sz="1300">
-              <a:latin typeface="Gulim"/>
-              <a:cs typeface="Gulim"/>
-            </a:endParaRPr>
-          </a:p>
-        </p:txBody>
-      </p:sp>
-      <p:graphicFrame>
-        <p:nvGraphicFramePr>
-          <p:cNvPr id="43" name="object 43"/>
-          <p:cNvGraphicFramePr>
-            <a:graphicFrameLocks noGrp="1"/>
-          </p:cNvGraphicFramePr>
-          <p:nvPr>
-            <p:extLst>
-              <p:ext uri="{D42A27DB-BD31-4B8C-83A1-F6EECF244321}">
-                <p14:modId xmlns:p14="http://schemas.microsoft.com/office/powerpoint/2010/main" val="3162104432"/>
-              </p:ext>
-            </p:extLst>
-          </p:nvPr>
-        </p:nvGraphicFramePr>
-        <p:xfrm>
-          <a:off x="618234" y="3531360"/>
-          <a:ext cx="5606896" cy="421640"/>
-        </p:xfrm>
-        <a:graphic>
-          <a:graphicData uri="http://schemas.openxmlformats.org/drawingml/2006/table">
-            <a:tbl>
-              <a:tblPr firstRow="1" bandRow="1">
-                <a:tableStyleId>{2D5ABB26-0587-4C30-8999-92F81FD0307C}</a:tableStyleId>
-              </a:tblPr>
-              <a:tblGrid>
-                <a:gridCol w="1603102">
-                  <a:extLst>
-                    <a:ext uri="{9D8B030D-6E8A-4147-A177-3AD203B41FA5}">
-                      <a16:colId xmlns:a16="http://schemas.microsoft.com/office/drawing/2014/main" val="20000"/>
-                    </a:ext>
-                  </a:extLst>
-                </a:gridCol>
-                <a:gridCol w="809473">
-                  <a:extLst>
-                    <a:ext uri="{9D8B030D-6E8A-4147-A177-3AD203B41FA5}">
-                      <a16:colId xmlns:a16="http://schemas.microsoft.com/office/drawing/2014/main" val="20001"/>
-                    </a:ext>
-                  </a:extLst>
-                </a:gridCol>
-                <a:gridCol w="805513">
-                  <a:extLst>
-                    <a:ext uri="{9D8B030D-6E8A-4147-A177-3AD203B41FA5}">
-                      <a16:colId xmlns:a16="http://schemas.microsoft.com/office/drawing/2014/main" val="20002"/>
-                    </a:ext>
-                  </a:extLst>
-                </a:gridCol>
-                <a:gridCol w="2388808">
-                  <a:extLst>
-                    <a:ext uri="{9D8B030D-6E8A-4147-A177-3AD203B41FA5}">
-                      <a16:colId xmlns:a16="http://schemas.microsoft.com/office/drawing/2014/main" val="20003"/>
-                    </a:ext>
-                  </a:extLst>
-                </a:gridCol>
-              </a:tblGrid>
-              <a:tr h="421640">
-                <a:tc>
-                  <a:txBody>
-                    <a:bodyPr/>
-                    <a:lstStyle/>
-                    <a:p>
-                      <a:pPr>
-                        <a:lnSpc>
-                          <a:spcPct val="100000"/>
-                        </a:lnSpc>
-                        <a:spcBef>
-                          <a:spcPts val="55"/>
-                        </a:spcBef>
-                      </a:pPr>
-                      <a:endParaRPr sz="900">
-                        <a:latin typeface="Times New Roman"/>
-                        <a:cs typeface="Times New Roman"/>
-                      </a:endParaRPr>
-                    </a:p>
-                    <a:p>
-                      <a:pPr marL="389890">
-                        <a:lnSpc>
-                          <a:spcPct val="100000"/>
-                        </a:lnSpc>
-                      </a:pPr>
-                      <a:r>
-                        <a:rPr sz="900" b="1" dirty="0">
-                          <a:solidFill>
-                            <a:srgbClr val="FFFFFF"/>
-                          </a:solidFill>
-                          <a:latin typeface="Gulim"/>
-                          <a:cs typeface="Gulim"/>
-                        </a:rPr>
-                        <a:t>[</a:t>
-                      </a:r>
-                      <a:r>
-                        <a:rPr sz="900" b="1" spc="15" dirty="0">
-                          <a:solidFill>
-                            <a:srgbClr val="FFFFFF"/>
-                          </a:solidFill>
-                          <a:latin typeface="Gulim"/>
-                          <a:cs typeface="Gulim"/>
-                        </a:rPr>
-                        <a:t> </a:t>
-                      </a:r>
-                      <a:r>
-                        <a:rPr sz="900" b="1" dirty="0">
-                          <a:solidFill>
-                            <a:srgbClr val="FFFFFF"/>
-                          </a:solidFill>
-                          <a:latin typeface="Gulim"/>
-                          <a:cs typeface="Gulim"/>
-                        </a:rPr>
-                        <a:t>BASE</a:t>
-                      </a:r>
-                      <a:r>
-                        <a:rPr sz="900" b="1" spc="-20" dirty="0">
-                          <a:solidFill>
-                            <a:srgbClr val="FFFFFF"/>
-                          </a:solidFill>
-                          <a:latin typeface="Gulim"/>
-                          <a:cs typeface="Gulim"/>
-                        </a:rPr>
-                        <a:t> </a:t>
-                      </a:r>
-                      <a:r>
-                        <a:rPr sz="900" b="1" dirty="0">
-                          <a:solidFill>
-                            <a:srgbClr val="FFFFFF"/>
-                          </a:solidFill>
-                          <a:latin typeface="Gulim"/>
-                          <a:cs typeface="Gulim"/>
-                        </a:rPr>
-                        <a:t>SEED</a:t>
-                      </a:r>
-                      <a:r>
-                        <a:rPr sz="900" b="1" spc="-15" dirty="0">
-                          <a:solidFill>
-                            <a:srgbClr val="FFFFFF"/>
-                          </a:solidFill>
-                          <a:latin typeface="Gulim"/>
-                          <a:cs typeface="Gulim"/>
-                        </a:rPr>
-                        <a:t> </a:t>
-                      </a:r>
-                      <a:r>
-                        <a:rPr sz="900" b="1" spc="-50" dirty="0">
-                          <a:solidFill>
-                            <a:srgbClr val="FFFFFF"/>
-                          </a:solidFill>
-                          <a:latin typeface="Gulim"/>
-                          <a:cs typeface="Gulim"/>
-                        </a:rPr>
-                        <a:t>]</a:t>
-                      </a:r>
-                      <a:endParaRPr sz="900">
-                        <a:latin typeface="Gulim"/>
-                        <a:cs typeface="Gulim"/>
-                      </a:endParaRPr>
-                    </a:p>
-                  </a:txBody>
-                  <a:tcPr marL="0" marR="0" marT="6985" marB="0">
-                    <a:lnL w="28575">
-                      <a:solidFill>
-                        <a:srgbClr val="FFFFFF"/>
-                      </a:solidFill>
-                      <a:prstDash val="solid"/>
-                    </a:lnL>
-                    <a:lnR w="19050">
-                      <a:solidFill>
-                        <a:srgbClr val="FFFFFF"/>
-                      </a:solidFill>
-                      <a:prstDash val="solid"/>
-                    </a:lnR>
-                    <a:lnT w="28575">
-                      <a:solidFill>
-                        <a:srgbClr val="FFFFFF"/>
-                      </a:solidFill>
-                      <a:prstDash val="solid"/>
-                    </a:lnT>
-                    <a:lnB w="28575">
-                      <a:solidFill>
-                        <a:srgbClr val="FFFFFF"/>
-                      </a:solidFill>
-                      <a:prstDash val="solid"/>
-                    </a:lnB>
-                    <a:solidFill>
-                      <a:srgbClr val="DC133B"/>
-                    </a:solidFill>
-                  </a:tcPr>
-                </a:tc>
-                <a:tc>
-                  <a:txBody>
-                    <a:bodyPr/>
-                    <a:lstStyle/>
-                    <a:p>
-                      <a:pPr>
-                        <a:lnSpc>
-                          <a:spcPct val="100000"/>
-                        </a:lnSpc>
-                        <a:spcBef>
-                          <a:spcPts val="55"/>
-                        </a:spcBef>
-                      </a:pPr>
-                      <a:endParaRPr sz="900">
-                        <a:latin typeface="Times New Roman"/>
-                        <a:cs typeface="Times New Roman"/>
-                      </a:endParaRPr>
-                    </a:p>
-                    <a:p>
-                      <a:pPr marL="111125">
-                        <a:lnSpc>
-                          <a:spcPct val="100000"/>
-                        </a:lnSpc>
-                      </a:pPr>
-                      <a:r>
-                        <a:rPr sz="900" b="1" dirty="0">
-                          <a:solidFill>
-                            <a:srgbClr val="FFFFFF"/>
-                          </a:solidFill>
-                          <a:latin typeface="Gulim"/>
-                          <a:cs typeface="Gulim"/>
-                        </a:rPr>
-                        <a:t>[ COUNT</a:t>
-                      </a:r>
-                      <a:r>
-                        <a:rPr sz="900" b="1" spc="-25" dirty="0">
-                          <a:solidFill>
-                            <a:srgbClr val="FFFFFF"/>
-                          </a:solidFill>
-                          <a:latin typeface="Gulim"/>
-                          <a:cs typeface="Gulim"/>
-                        </a:rPr>
-                        <a:t> </a:t>
-                      </a:r>
-                      <a:r>
-                        <a:rPr sz="900" b="1" spc="-50" dirty="0">
-                          <a:solidFill>
-                            <a:srgbClr val="FFFFFF"/>
-                          </a:solidFill>
-                          <a:latin typeface="Gulim"/>
-                          <a:cs typeface="Gulim"/>
-                        </a:rPr>
-                        <a:t>]</a:t>
-                      </a:r>
-                      <a:endParaRPr sz="900">
-                        <a:latin typeface="Gulim"/>
-                        <a:cs typeface="Gulim"/>
-                      </a:endParaRPr>
-                    </a:p>
-                  </a:txBody>
-                  <a:tcPr marL="0" marR="0" marT="6985" marB="0">
-                    <a:lnL w="19050">
-                      <a:solidFill>
-                        <a:srgbClr val="FFFFFF"/>
-                      </a:solidFill>
-                      <a:prstDash val="solid"/>
-                    </a:lnL>
-                    <a:lnR w="19050">
-                      <a:solidFill>
-                        <a:srgbClr val="FFFFFF"/>
-                      </a:solidFill>
-                      <a:prstDash val="solid"/>
-                    </a:lnR>
-                    <a:lnT w="28575">
-                      <a:solidFill>
-                        <a:srgbClr val="FFFFFF"/>
-                      </a:solidFill>
-                      <a:prstDash val="solid"/>
-                    </a:lnT>
-                    <a:lnB w="28575">
-                      <a:solidFill>
-                        <a:srgbClr val="FFFFFF"/>
-                      </a:solidFill>
-                      <a:prstDash val="solid"/>
-                    </a:lnB>
-                    <a:solidFill>
-                      <a:srgbClr val="218A21"/>
-                    </a:solidFill>
-                  </a:tcPr>
-                </a:tc>
-                <a:tc>
-                  <a:txBody>
-                    <a:bodyPr/>
-                    <a:lstStyle/>
-                    <a:p>
-                      <a:pPr>
-                        <a:lnSpc>
-                          <a:spcPct val="100000"/>
-                        </a:lnSpc>
-                        <a:spcBef>
-                          <a:spcPts val="55"/>
-                        </a:spcBef>
-                      </a:pPr>
-                      <a:endParaRPr sz="900">
-                        <a:latin typeface="Times New Roman"/>
-                        <a:cs typeface="Times New Roman"/>
-                      </a:endParaRPr>
-                    </a:p>
-                    <a:p>
-                      <a:pPr marL="249554">
-                        <a:lnSpc>
-                          <a:spcPct val="100000"/>
-                        </a:lnSpc>
-                      </a:pPr>
-                      <a:r>
-                        <a:rPr sz="900" b="1" dirty="0">
-                          <a:solidFill>
-                            <a:srgbClr val="FFFFFF"/>
-                          </a:solidFill>
-                          <a:latin typeface="Gulim"/>
-                          <a:cs typeface="Gulim"/>
-                        </a:rPr>
-                        <a:t>[</a:t>
-                      </a:r>
-                      <a:r>
-                        <a:rPr sz="900" b="1" spc="-5" dirty="0">
-                          <a:solidFill>
-                            <a:srgbClr val="FFFFFF"/>
-                          </a:solidFill>
-                          <a:latin typeface="Gulim"/>
-                          <a:cs typeface="Gulim"/>
-                        </a:rPr>
-                        <a:t> </a:t>
-                      </a:r>
-                      <a:r>
-                        <a:rPr sz="900" b="1" dirty="0">
-                          <a:solidFill>
-                            <a:srgbClr val="FFFFFF"/>
-                          </a:solidFill>
-                          <a:latin typeface="Gulim"/>
-                          <a:cs typeface="Gulim"/>
-                        </a:rPr>
-                        <a:t>ID</a:t>
-                      </a:r>
-                      <a:r>
-                        <a:rPr sz="900" b="1" spc="-5" dirty="0">
-                          <a:solidFill>
-                            <a:srgbClr val="FFFFFF"/>
-                          </a:solidFill>
-                          <a:latin typeface="Gulim"/>
-                          <a:cs typeface="Gulim"/>
-                        </a:rPr>
-                        <a:t> </a:t>
-                      </a:r>
-                      <a:r>
-                        <a:rPr sz="900" b="1" spc="-50" dirty="0">
-                          <a:solidFill>
-                            <a:srgbClr val="FFFFFF"/>
-                          </a:solidFill>
-                          <a:latin typeface="Gulim"/>
-                          <a:cs typeface="Gulim"/>
-                        </a:rPr>
-                        <a:t>]</a:t>
-                      </a:r>
-                      <a:endParaRPr sz="900">
-                        <a:latin typeface="Gulim"/>
-                        <a:cs typeface="Gulim"/>
-                      </a:endParaRPr>
-                    </a:p>
-                  </a:txBody>
-                  <a:tcPr marL="0" marR="0" marT="6985" marB="0">
-                    <a:lnL w="19050">
-                      <a:solidFill>
-                        <a:srgbClr val="FFFFFF"/>
-                      </a:solidFill>
-                      <a:prstDash val="solid"/>
-                    </a:lnL>
-                    <a:lnR w="19050">
-                      <a:solidFill>
-                        <a:srgbClr val="FFFFFF"/>
-                      </a:solidFill>
-                      <a:prstDash val="solid"/>
-                    </a:lnR>
-                    <a:lnT w="28575">
-                      <a:solidFill>
-                        <a:srgbClr val="FFFFFF"/>
-                      </a:solidFill>
-                      <a:prstDash val="solid"/>
-                    </a:lnT>
-                    <a:lnB w="28575">
-                      <a:solidFill>
-                        <a:srgbClr val="FFFFFF"/>
-                      </a:solidFill>
-                      <a:prstDash val="solid"/>
-                    </a:lnB>
-                    <a:solidFill>
-                      <a:srgbClr val="4169E0"/>
-                    </a:solidFill>
-                  </a:tcPr>
-                </a:tc>
-                <a:tc>
-                  <a:txBody>
-                    <a:bodyPr/>
-                    <a:lstStyle/>
-                    <a:p>
-                      <a:pPr>
-                        <a:lnSpc>
-                          <a:spcPct val="100000"/>
-                        </a:lnSpc>
-                        <a:spcBef>
-                          <a:spcPts val="55"/>
-                        </a:spcBef>
-                      </a:pPr>
-                      <a:endParaRPr sz="900">
-                        <a:latin typeface="Times New Roman"/>
-                        <a:cs typeface="Times New Roman"/>
-                      </a:endParaRPr>
-                    </a:p>
-                    <a:p>
-                      <a:pPr marL="499745">
-                        <a:lnSpc>
-                          <a:spcPct val="100000"/>
-                        </a:lnSpc>
-                      </a:pPr>
-                      <a:r>
-                        <a:rPr sz="900" b="1" dirty="0">
-                          <a:solidFill>
-                            <a:srgbClr val="FFFFFF"/>
-                          </a:solidFill>
-                          <a:latin typeface="Gulim"/>
-                          <a:cs typeface="Gulim"/>
-                        </a:rPr>
-                        <a:t>[ USAGE</a:t>
-                      </a:r>
-                      <a:r>
-                        <a:rPr sz="900" b="1" spc="-40" dirty="0">
-                          <a:solidFill>
-                            <a:srgbClr val="FFFFFF"/>
-                          </a:solidFill>
-                          <a:latin typeface="Gulim"/>
-                          <a:cs typeface="Gulim"/>
-                        </a:rPr>
-                        <a:t> </a:t>
-                      </a:r>
-                      <a:r>
-                        <a:rPr sz="900" b="1" dirty="0">
-                          <a:solidFill>
-                            <a:srgbClr val="FFFFFF"/>
-                          </a:solidFill>
-                          <a:latin typeface="Gulim"/>
-                          <a:cs typeface="Gulim"/>
-                        </a:rPr>
-                        <a:t>PROGRESS...</a:t>
-                      </a:r>
-                      <a:r>
-                        <a:rPr sz="900" b="1" spc="-20" dirty="0">
-                          <a:solidFill>
-                            <a:srgbClr val="FFFFFF"/>
-                          </a:solidFill>
-                          <a:latin typeface="Gulim"/>
-                          <a:cs typeface="Gulim"/>
-                        </a:rPr>
-                        <a:t> </a:t>
-                      </a:r>
-                      <a:r>
-                        <a:rPr sz="900" b="1" spc="-50" dirty="0">
-                          <a:solidFill>
-                            <a:srgbClr val="FFFFFF"/>
-                          </a:solidFill>
-                          <a:latin typeface="Gulim"/>
-                          <a:cs typeface="Gulim"/>
-                        </a:rPr>
-                        <a:t>]</a:t>
-                      </a:r>
-                      <a:endParaRPr sz="900">
-                        <a:latin typeface="Gulim"/>
-                        <a:cs typeface="Gulim"/>
-                      </a:endParaRPr>
-                    </a:p>
-                  </a:txBody>
-                  <a:tcPr marL="0" marR="0" marT="6985" marB="0">
-                    <a:lnL w="19050">
-                      <a:solidFill>
-                        <a:srgbClr val="FFFFFF"/>
-                      </a:solidFill>
-                      <a:prstDash val="solid"/>
-                    </a:lnL>
-                    <a:lnR w="28575">
-                      <a:solidFill>
-                        <a:srgbClr val="FFFFFF"/>
-                      </a:solidFill>
-                      <a:prstDash val="solid"/>
-                    </a:lnR>
-                    <a:lnT w="28575">
-                      <a:solidFill>
-                        <a:srgbClr val="FFFFFF"/>
-                      </a:solidFill>
-                      <a:prstDash val="solid"/>
-                    </a:lnT>
-                    <a:lnB w="28575">
-                      <a:solidFill>
-                        <a:srgbClr val="FFFFFF"/>
-                      </a:solidFill>
-                      <a:prstDash val="solid"/>
-                    </a:lnB>
-                    <a:solidFill>
-                      <a:srgbClr val="333333"/>
-                    </a:solidFill>
-                  </a:tcPr>
-                </a:tc>
-                <a:extLst>
-                  <a:ext uri="{0D108BD9-81ED-4DB2-BD59-A6C34878D82A}">
-                    <a16:rowId xmlns:a16="http://schemas.microsoft.com/office/drawing/2014/main" val="10000"/>
-                  </a:ext>
-                </a:extLst>
-              </a:tr>
-            </a:tbl>
-          </a:graphicData>
-        </a:graphic>
-      </p:graphicFrame>
-      <p:grpSp>
-        <p:nvGrpSpPr>
-          <p:cNvPr id="44" name="object 44"/>
-          <p:cNvGrpSpPr/>
-          <p:nvPr/>
-        </p:nvGrpSpPr>
-        <p:grpSpPr>
-          <a:xfrm>
-            <a:off x="623823" y="3311650"/>
-            <a:ext cx="5611519" cy="1469390"/>
-            <a:chOff x="1441450" y="3310128"/>
-            <a:chExt cx="5396865" cy="1469390"/>
-          </a:xfrm>
-        </p:grpSpPr>
-        <p:sp>
-          <p:nvSpPr>
-            <p:cNvPr id="45" name="object 45"/>
-            <p:cNvSpPr/>
-            <p:nvPr/>
-          </p:nvSpPr>
-          <p:spPr>
-            <a:xfrm>
-              <a:off x="1447800" y="3310128"/>
-              <a:ext cx="5390515" cy="17145"/>
-            </a:xfrm>
-            <a:custGeom>
-              <a:avLst/>
-              <a:gdLst/>
-              <a:ahLst/>
-              <a:cxnLst/>
-              <a:rect l="l" t="t" r="r" b="b"/>
-              <a:pathLst>
-                <a:path w="5390515" h="17145">
-                  <a:moveTo>
-                    <a:pt x="5390388" y="0"/>
-                  </a:moveTo>
-                  <a:lnTo>
-                    <a:pt x="0" y="0"/>
-                  </a:lnTo>
-                  <a:lnTo>
-                    <a:pt x="0" y="16763"/>
-                  </a:lnTo>
-                  <a:lnTo>
-                    <a:pt x="5390388" y="16763"/>
-                  </a:lnTo>
-                  <a:lnTo>
-                    <a:pt x="5390388" y="0"/>
-                  </a:lnTo>
-                  <a:close/>
-                </a:path>
-              </a:pathLst>
-            </a:custGeom>
-            <a:solidFill>
-              <a:srgbClr val="86CEF9"/>
-            </a:solidFill>
-          </p:spPr>
-          <p:txBody>
-            <a:bodyPr wrap="square" lIns="0" tIns="0" rIns="0" bIns="0" rtlCol="0"/>
-            <a:lstStyle/>
-            <a:p>
-              <a:endParaRPr/>
-            </a:p>
-          </p:txBody>
-        </p:sp>
-        <p:sp>
-          <p:nvSpPr>
-            <p:cNvPr id="46" name="object 46"/>
-            <p:cNvSpPr/>
-            <p:nvPr/>
-          </p:nvSpPr>
-          <p:spPr>
-            <a:xfrm>
-              <a:off x="1447800" y="4178808"/>
-              <a:ext cx="2571115" cy="594360"/>
-            </a:xfrm>
-            <a:custGeom>
-              <a:avLst/>
-              <a:gdLst/>
-              <a:ahLst/>
-              <a:cxnLst/>
-              <a:rect l="l" t="t" r="r" b="b"/>
-              <a:pathLst>
-                <a:path w="2571115" h="594360">
-                  <a:moveTo>
-                    <a:pt x="0" y="95885"/>
-                  </a:moveTo>
-                  <a:lnTo>
-                    <a:pt x="7534" y="58560"/>
-                  </a:lnTo>
-                  <a:lnTo>
-                    <a:pt x="28082" y="28082"/>
-                  </a:lnTo>
-                  <a:lnTo>
-                    <a:pt x="58560" y="7534"/>
-                  </a:lnTo>
-                  <a:lnTo>
-                    <a:pt x="95884" y="0"/>
-                  </a:lnTo>
-                  <a:lnTo>
-                    <a:pt x="2475103" y="0"/>
-                  </a:lnTo>
-                  <a:lnTo>
-                    <a:pt x="2512427" y="7534"/>
-                  </a:lnTo>
-                  <a:lnTo>
-                    <a:pt x="2542905" y="28082"/>
-                  </a:lnTo>
-                  <a:lnTo>
-                    <a:pt x="2563453" y="58560"/>
-                  </a:lnTo>
-                  <a:lnTo>
-                    <a:pt x="2570988" y="95885"/>
-                  </a:lnTo>
-                  <a:lnTo>
-                    <a:pt x="2570988" y="498475"/>
-                  </a:lnTo>
-                  <a:lnTo>
-                    <a:pt x="2563453" y="535799"/>
-                  </a:lnTo>
-                  <a:lnTo>
-                    <a:pt x="2542905" y="566277"/>
-                  </a:lnTo>
-                  <a:lnTo>
-                    <a:pt x="2512427" y="586825"/>
-                  </a:lnTo>
-                  <a:lnTo>
-                    <a:pt x="2475103" y="594360"/>
-                  </a:lnTo>
-                  <a:lnTo>
-                    <a:pt x="95884" y="594360"/>
-                  </a:lnTo>
-                  <a:lnTo>
-                    <a:pt x="58560" y="586825"/>
-                  </a:lnTo>
-                  <a:lnTo>
-                    <a:pt x="28082" y="566277"/>
-                  </a:lnTo>
-                  <a:lnTo>
-                    <a:pt x="7534" y="535799"/>
-                  </a:lnTo>
-                  <a:lnTo>
-                    <a:pt x="0" y="498475"/>
-                  </a:lnTo>
-                  <a:lnTo>
-                    <a:pt x="0" y="95885"/>
-                  </a:lnTo>
-                  <a:close/>
-                </a:path>
-              </a:pathLst>
-            </a:custGeom>
-            <a:ln w="12700">
-              <a:solidFill>
-                <a:srgbClr val="DC133B"/>
-              </a:solidFill>
-            </a:ln>
-          </p:spPr>
-          <p:txBody>
-            <a:bodyPr wrap="square" lIns="0" tIns="0" rIns="0" bIns="0" rtlCol="0"/>
-            <a:lstStyle/>
-            <a:p>
-              <a:endParaRPr/>
-            </a:p>
-          </p:txBody>
-        </p:sp>
-      </p:grpSp>
-      <p:sp>
-        <p:nvSpPr>
-          <p:cNvPr id="47" name="object 47"/>
-          <p:cNvSpPr txBox="1"/>
-          <p:nvPr/>
-        </p:nvSpPr>
-        <p:spPr>
-          <a:xfrm>
-            <a:off x="741551" y="4213940"/>
-            <a:ext cx="2012462" cy="454025"/>
-          </a:xfrm>
-          <a:prstGeom prst="rect">
-            <a:avLst/>
-          </a:prstGeom>
-        </p:spPr>
-        <p:txBody>
-          <a:bodyPr vert="horz" wrap="square" lIns="0" tIns="85090" rIns="0" bIns="0" rtlCol="0">
-            <a:spAutoFit/>
-          </a:bodyPr>
-          <a:lstStyle/>
-          <a:p>
-            <a:pPr marL="12700">
-              <a:lnSpc>
-                <a:spcPct val="100000"/>
-              </a:lnSpc>
-              <a:spcBef>
-                <a:spcPts val="670"/>
-              </a:spcBef>
-            </a:pPr>
-            <a:r>
-              <a:rPr sz="1000" b="1" spc="-10" dirty="0">
-                <a:solidFill>
-                  <a:srgbClr val="DC133B"/>
-                </a:solidFill>
-                <a:latin typeface="Gulim"/>
-                <a:cs typeface="Gulim"/>
-              </a:rPr>
-              <a:t>00000000001826533749</a:t>
-            </a:r>
-            <a:r>
-              <a:rPr sz="1000" b="1" spc="80" dirty="0">
-                <a:solidFill>
-                  <a:srgbClr val="DC133B"/>
-                </a:solidFill>
-                <a:latin typeface="Gulim"/>
-                <a:cs typeface="Gulim"/>
-              </a:rPr>
-              <a:t> </a:t>
-            </a:r>
-            <a:r>
-              <a:rPr sz="1000" b="1" spc="-20" dirty="0">
-                <a:solidFill>
-                  <a:srgbClr val="DC133B"/>
-                </a:solidFill>
-                <a:latin typeface="Gulim"/>
-                <a:cs typeface="Gulim"/>
-              </a:rPr>
-              <a:t>(20자)</a:t>
-            </a:r>
-            <a:endParaRPr sz="1000">
-              <a:latin typeface="Gulim"/>
-              <a:cs typeface="Gulim"/>
-            </a:endParaRPr>
-          </a:p>
-          <a:p>
-            <a:pPr marL="12700">
-              <a:lnSpc>
-                <a:spcPct val="100000"/>
-              </a:lnSpc>
-              <a:spcBef>
-                <a:spcPts val="520"/>
-              </a:spcBef>
-            </a:pPr>
-            <a:r>
-              <a:rPr sz="900" dirty="0">
-                <a:solidFill>
-                  <a:srgbClr val="C0C0C0"/>
-                </a:solidFill>
-                <a:latin typeface="Gulim"/>
-                <a:cs typeface="Gulim"/>
-              </a:rPr>
-              <a:t>맵과 규칙을 생성하는 고유 </a:t>
-            </a:r>
-            <a:r>
-              <a:rPr sz="900" spc="-10" dirty="0">
-                <a:solidFill>
-                  <a:srgbClr val="C0C0C0"/>
-                </a:solidFill>
-                <a:latin typeface="Gulim"/>
-                <a:cs typeface="Gulim"/>
-              </a:rPr>
-              <a:t>Seed번호</a:t>
-            </a:r>
-            <a:endParaRPr sz="900">
-              <a:latin typeface="Gulim"/>
-              <a:cs typeface="Gulim"/>
-            </a:endParaRPr>
-          </a:p>
-        </p:txBody>
-      </p:sp>
-      <p:sp>
-        <p:nvSpPr>
-          <p:cNvPr id="48" name="object 48"/>
-          <p:cNvSpPr/>
-          <p:nvPr/>
-        </p:nvSpPr>
-        <p:spPr>
-          <a:xfrm>
-            <a:off x="3449572" y="4180330"/>
-            <a:ext cx="2675359" cy="594360"/>
-          </a:xfrm>
-          <a:custGeom>
-            <a:avLst/>
-            <a:gdLst/>
-            <a:ahLst/>
-            <a:cxnLst/>
-            <a:rect l="l" t="t" r="r" b="b"/>
-            <a:pathLst>
-              <a:path w="2573020" h="594360">
-                <a:moveTo>
-                  <a:pt x="0" y="95885"/>
-                </a:moveTo>
-                <a:lnTo>
-                  <a:pt x="7534" y="58560"/>
-                </a:lnTo>
-                <a:lnTo>
-                  <a:pt x="28082" y="28082"/>
-                </a:lnTo>
-                <a:lnTo>
-                  <a:pt x="58560" y="7534"/>
-                </a:lnTo>
-                <a:lnTo>
-                  <a:pt x="95885" y="0"/>
-                </a:lnTo>
-                <a:lnTo>
-                  <a:pt x="2476627" y="0"/>
-                </a:lnTo>
-                <a:lnTo>
-                  <a:pt x="2513951" y="7534"/>
-                </a:lnTo>
-                <a:lnTo>
-                  <a:pt x="2544429" y="28082"/>
-                </a:lnTo>
-                <a:lnTo>
-                  <a:pt x="2564977" y="58560"/>
-                </a:lnTo>
-                <a:lnTo>
-                  <a:pt x="2572511" y="95885"/>
-                </a:lnTo>
-                <a:lnTo>
-                  <a:pt x="2572511" y="498475"/>
-                </a:lnTo>
-                <a:lnTo>
-                  <a:pt x="2564977" y="535799"/>
-                </a:lnTo>
-                <a:lnTo>
-                  <a:pt x="2544429" y="566277"/>
-                </a:lnTo>
-                <a:lnTo>
-                  <a:pt x="2513951" y="586825"/>
-                </a:lnTo>
-                <a:lnTo>
-                  <a:pt x="2476627" y="594360"/>
-                </a:lnTo>
-                <a:lnTo>
-                  <a:pt x="95885" y="594360"/>
-                </a:lnTo>
-                <a:lnTo>
-                  <a:pt x="58560" y="586825"/>
-                </a:lnTo>
-                <a:lnTo>
-                  <a:pt x="28082" y="566277"/>
-                </a:lnTo>
-                <a:lnTo>
-                  <a:pt x="7534" y="535799"/>
-                </a:lnTo>
-                <a:lnTo>
-                  <a:pt x="0" y="498475"/>
-                </a:lnTo>
-                <a:lnTo>
-                  <a:pt x="0" y="95885"/>
-                </a:lnTo>
-                <a:close/>
-              </a:path>
-            </a:pathLst>
-          </a:custGeom>
-          <a:ln w="12700">
-            <a:solidFill>
-              <a:srgbClr val="218A21"/>
-            </a:solidFill>
-          </a:ln>
-        </p:spPr>
-        <p:txBody>
-          <a:bodyPr wrap="square" lIns="0" tIns="0" rIns="0" bIns="0" rtlCol="0"/>
-          <a:lstStyle/>
-          <a:p>
-            <a:endParaRPr/>
-          </a:p>
-        </p:txBody>
-      </p:sp>
-      <p:sp>
-        <p:nvSpPr>
-          <p:cNvPr id="49" name="object 49"/>
-          <p:cNvSpPr txBox="1"/>
-          <p:nvPr/>
-        </p:nvSpPr>
-        <p:spPr>
-          <a:xfrm>
-            <a:off x="3560951" y="4213940"/>
-            <a:ext cx="2294391" cy="454025"/>
-          </a:xfrm>
-          <a:prstGeom prst="rect">
-            <a:avLst/>
-          </a:prstGeom>
-        </p:spPr>
-        <p:txBody>
-          <a:bodyPr vert="horz" wrap="square" lIns="0" tIns="85090" rIns="0" bIns="0" rtlCol="0">
-            <a:spAutoFit/>
-          </a:bodyPr>
-          <a:lstStyle/>
-          <a:p>
-            <a:pPr marL="12700">
-              <a:lnSpc>
-                <a:spcPct val="100000"/>
-              </a:lnSpc>
-              <a:spcBef>
-                <a:spcPts val="670"/>
-              </a:spcBef>
-            </a:pPr>
-            <a:r>
-              <a:rPr sz="1000" b="1" dirty="0">
-                <a:solidFill>
-                  <a:srgbClr val="218A21"/>
-                </a:solidFill>
-                <a:latin typeface="Gulim"/>
-                <a:cs typeface="Gulim"/>
-              </a:rPr>
-              <a:t>003</a:t>
-            </a:r>
-            <a:r>
-              <a:rPr sz="1000" b="1" spc="-25" dirty="0">
-                <a:solidFill>
-                  <a:srgbClr val="218A21"/>
-                </a:solidFill>
-                <a:latin typeface="Gulim"/>
-                <a:cs typeface="Gulim"/>
-              </a:rPr>
-              <a:t> </a:t>
-            </a:r>
-            <a:r>
-              <a:rPr sz="1000" b="1" spc="-20" dirty="0">
-                <a:solidFill>
-                  <a:srgbClr val="218A21"/>
-                </a:solidFill>
-                <a:latin typeface="Gulim"/>
-                <a:cs typeface="Gulim"/>
-              </a:rPr>
-              <a:t>(3자)</a:t>
-            </a:r>
-            <a:endParaRPr sz="1000">
-              <a:latin typeface="Gulim"/>
-              <a:cs typeface="Gulim"/>
-            </a:endParaRPr>
-          </a:p>
-          <a:p>
-            <a:pPr marL="12700">
-              <a:lnSpc>
-                <a:spcPct val="100000"/>
-              </a:lnSpc>
-              <a:spcBef>
-                <a:spcPts val="520"/>
-              </a:spcBef>
-            </a:pPr>
-            <a:r>
-              <a:rPr sz="900" dirty="0">
-                <a:solidFill>
-                  <a:srgbClr val="C0C0C0"/>
-                </a:solidFill>
-                <a:latin typeface="Gulim"/>
-                <a:cs typeface="Gulim"/>
-              </a:rPr>
-              <a:t>저장된</a:t>
-            </a:r>
-            <a:r>
-              <a:rPr sz="900" spc="-5" dirty="0">
-                <a:solidFill>
-                  <a:srgbClr val="C0C0C0"/>
-                </a:solidFill>
-                <a:latin typeface="Gulim"/>
-                <a:cs typeface="Gulim"/>
-              </a:rPr>
-              <a:t> </a:t>
-            </a:r>
-            <a:r>
-              <a:rPr sz="900" dirty="0">
-                <a:solidFill>
-                  <a:srgbClr val="C0C0C0"/>
-                </a:solidFill>
-                <a:latin typeface="Gulim"/>
-                <a:cs typeface="Gulim"/>
-              </a:rPr>
-              <a:t>도메인(맵,</a:t>
-            </a:r>
-            <a:r>
-              <a:rPr sz="900" spc="-5" dirty="0">
-                <a:solidFill>
-                  <a:srgbClr val="C0C0C0"/>
-                </a:solidFill>
-                <a:latin typeface="Gulim"/>
-                <a:cs typeface="Gulim"/>
-              </a:rPr>
-              <a:t> </a:t>
-            </a:r>
-            <a:r>
-              <a:rPr sz="900" dirty="0">
-                <a:solidFill>
-                  <a:srgbClr val="C0C0C0"/>
-                </a:solidFill>
-                <a:latin typeface="Gulim"/>
-                <a:cs typeface="Gulim"/>
-              </a:rPr>
-              <a:t>퀘스트,</a:t>
-            </a:r>
-            <a:r>
-              <a:rPr sz="900" spc="-5" dirty="0">
-                <a:solidFill>
-                  <a:srgbClr val="C0C0C0"/>
-                </a:solidFill>
-                <a:latin typeface="Gulim"/>
-                <a:cs typeface="Gulim"/>
-              </a:rPr>
-              <a:t> </a:t>
-            </a:r>
-            <a:r>
-              <a:rPr sz="900" dirty="0">
-                <a:solidFill>
-                  <a:srgbClr val="C0C0C0"/>
-                </a:solidFill>
-                <a:latin typeface="Gulim"/>
-                <a:cs typeface="Gulim"/>
-              </a:rPr>
-              <a:t>스킬 등)의 </a:t>
-            </a:r>
-            <a:r>
-              <a:rPr sz="900" spc="-25" dirty="0">
-                <a:solidFill>
-                  <a:srgbClr val="C0C0C0"/>
-                </a:solidFill>
-                <a:latin typeface="Gulim"/>
-                <a:cs typeface="Gulim"/>
-              </a:rPr>
-              <a:t>개수</a:t>
-            </a:r>
-            <a:endParaRPr sz="900">
-              <a:latin typeface="Gulim"/>
-              <a:cs typeface="Gulim"/>
-            </a:endParaRPr>
-          </a:p>
-        </p:txBody>
-      </p:sp>
-      <p:sp>
-        <p:nvSpPr>
-          <p:cNvPr id="50" name="object 50"/>
-          <p:cNvSpPr/>
-          <p:nvPr/>
-        </p:nvSpPr>
-        <p:spPr>
-          <a:xfrm>
-            <a:off x="630173" y="4902706"/>
-            <a:ext cx="2673378" cy="594360"/>
-          </a:xfrm>
-          <a:custGeom>
-            <a:avLst/>
-            <a:gdLst/>
-            <a:ahLst/>
-            <a:cxnLst/>
-            <a:rect l="l" t="t" r="r" b="b"/>
-            <a:pathLst>
-              <a:path w="2571115" h="594360">
-                <a:moveTo>
-                  <a:pt x="0" y="95885"/>
-                </a:moveTo>
-                <a:lnTo>
-                  <a:pt x="7534" y="58560"/>
-                </a:lnTo>
-                <a:lnTo>
-                  <a:pt x="28082" y="28082"/>
-                </a:lnTo>
-                <a:lnTo>
-                  <a:pt x="58560" y="7534"/>
-                </a:lnTo>
-                <a:lnTo>
-                  <a:pt x="95884" y="0"/>
-                </a:lnTo>
-                <a:lnTo>
-                  <a:pt x="2475103" y="0"/>
-                </a:lnTo>
-                <a:lnTo>
-                  <a:pt x="2512427" y="7534"/>
-                </a:lnTo>
-                <a:lnTo>
-                  <a:pt x="2542905" y="28082"/>
-                </a:lnTo>
-                <a:lnTo>
-                  <a:pt x="2563453" y="58560"/>
-                </a:lnTo>
-                <a:lnTo>
-                  <a:pt x="2570988" y="95885"/>
-                </a:lnTo>
-                <a:lnTo>
-                  <a:pt x="2570988" y="498475"/>
-                </a:lnTo>
-                <a:lnTo>
-                  <a:pt x="2563453" y="535799"/>
-                </a:lnTo>
-                <a:lnTo>
-                  <a:pt x="2542905" y="566277"/>
-                </a:lnTo>
-                <a:lnTo>
-                  <a:pt x="2512427" y="586825"/>
-                </a:lnTo>
-                <a:lnTo>
-                  <a:pt x="2475103" y="594360"/>
-                </a:lnTo>
-                <a:lnTo>
-                  <a:pt x="95884" y="594360"/>
-                </a:lnTo>
-                <a:lnTo>
-                  <a:pt x="58560" y="586825"/>
-                </a:lnTo>
-                <a:lnTo>
-                  <a:pt x="28082" y="566277"/>
-                </a:lnTo>
-                <a:lnTo>
-                  <a:pt x="7534" y="535799"/>
-                </a:lnTo>
-                <a:lnTo>
-                  <a:pt x="0" y="498475"/>
-                </a:lnTo>
-                <a:lnTo>
-                  <a:pt x="0" y="95885"/>
-                </a:lnTo>
-                <a:close/>
-              </a:path>
-            </a:pathLst>
-          </a:custGeom>
-          <a:ln w="12700">
-            <a:solidFill>
-              <a:srgbClr val="4169E0"/>
-            </a:solidFill>
-          </a:ln>
-        </p:spPr>
-        <p:txBody>
-          <a:bodyPr wrap="square" lIns="0" tIns="0" rIns="0" bIns="0" rtlCol="0"/>
-          <a:lstStyle/>
-          <a:p>
-            <a:endParaRPr/>
-          </a:p>
-        </p:txBody>
-      </p:sp>
-      <p:sp>
-        <p:nvSpPr>
-          <p:cNvPr id="51" name="object 51"/>
-          <p:cNvSpPr txBox="1"/>
-          <p:nvPr/>
-        </p:nvSpPr>
-        <p:spPr>
-          <a:xfrm>
-            <a:off x="741550" y="4934089"/>
-            <a:ext cx="600833" cy="455295"/>
-          </a:xfrm>
-          <a:prstGeom prst="rect">
-            <a:avLst/>
-          </a:prstGeom>
-        </p:spPr>
-        <p:txBody>
-          <a:bodyPr vert="horz" wrap="square" lIns="0" tIns="85725" rIns="0" bIns="0" rtlCol="0">
-            <a:spAutoFit/>
-          </a:bodyPr>
-          <a:lstStyle/>
-          <a:p>
-            <a:pPr marL="12700">
-              <a:lnSpc>
-                <a:spcPct val="100000"/>
-              </a:lnSpc>
-              <a:spcBef>
-                <a:spcPts val="675"/>
-              </a:spcBef>
-            </a:pPr>
-            <a:r>
-              <a:rPr sz="1000" b="1" dirty="0">
-                <a:solidFill>
-                  <a:srgbClr val="4169E0"/>
-                </a:solidFill>
-                <a:latin typeface="Gulim"/>
-                <a:cs typeface="Gulim"/>
-              </a:rPr>
-              <a:t>001</a:t>
-            </a:r>
-            <a:r>
-              <a:rPr sz="1000" b="1" spc="-25" dirty="0">
-                <a:solidFill>
-                  <a:srgbClr val="4169E0"/>
-                </a:solidFill>
-                <a:latin typeface="Gulim"/>
-                <a:cs typeface="Gulim"/>
-              </a:rPr>
-              <a:t> </a:t>
-            </a:r>
-            <a:r>
-              <a:rPr sz="1000" b="1" spc="-20" dirty="0">
-                <a:solidFill>
-                  <a:srgbClr val="4169E0"/>
-                </a:solidFill>
-                <a:latin typeface="Gulim"/>
-                <a:cs typeface="Gulim"/>
-              </a:rPr>
-              <a:t>(3자)</a:t>
-            </a:r>
-            <a:endParaRPr sz="1000">
-              <a:latin typeface="Gulim"/>
-              <a:cs typeface="Gulim"/>
-            </a:endParaRPr>
-          </a:p>
-          <a:p>
-            <a:pPr marL="12700">
-              <a:lnSpc>
-                <a:spcPct val="100000"/>
-              </a:lnSpc>
-              <a:spcBef>
-                <a:spcPts val="525"/>
-              </a:spcBef>
-            </a:pPr>
-            <a:r>
-              <a:rPr sz="900" dirty="0">
-                <a:solidFill>
-                  <a:srgbClr val="C0C0C0"/>
-                </a:solidFill>
-                <a:latin typeface="Gulim"/>
-                <a:cs typeface="Gulim"/>
-              </a:rPr>
-              <a:t>도메인 </a:t>
-            </a:r>
-            <a:r>
-              <a:rPr sz="900" spc="-50" dirty="0">
-                <a:solidFill>
-                  <a:srgbClr val="C0C0C0"/>
-                </a:solidFill>
-                <a:latin typeface="Gulim"/>
-                <a:cs typeface="Gulim"/>
-              </a:rPr>
-              <a:t>값</a:t>
-            </a:r>
-            <a:endParaRPr sz="900">
-              <a:latin typeface="Gulim"/>
-              <a:cs typeface="Gulim"/>
-            </a:endParaRPr>
-          </a:p>
-        </p:txBody>
-      </p:sp>
-      <p:sp>
-        <p:nvSpPr>
-          <p:cNvPr id="52" name="object 52"/>
-          <p:cNvSpPr/>
-          <p:nvPr/>
-        </p:nvSpPr>
-        <p:spPr>
-          <a:xfrm>
-            <a:off x="3449572" y="4902706"/>
-            <a:ext cx="2675359" cy="594360"/>
-          </a:xfrm>
-          <a:custGeom>
-            <a:avLst/>
-            <a:gdLst/>
-            <a:ahLst/>
-            <a:cxnLst/>
-            <a:rect l="l" t="t" r="r" b="b"/>
-            <a:pathLst>
-              <a:path w="2573020" h="594360">
-                <a:moveTo>
-                  <a:pt x="0" y="95885"/>
-                </a:moveTo>
-                <a:lnTo>
-                  <a:pt x="7534" y="58560"/>
-                </a:lnTo>
-                <a:lnTo>
-                  <a:pt x="28082" y="28082"/>
-                </a:lnTo>
-                <a:lnTo>
-                  <a:pt x="58560" y="7534"/>
-                </a:lnTo>
-                <a:lnTo>
-                  <a:pt x="95885" y="0"/>
-                </a:lnTo>
-                <a:lnTo>
-                  <a:pt x="2476627" y="0"/>
-                </a:lnTo>
-                <a:lnTo>
-                  <a:pt x="2513951" y="7534"/>
-                </a:lnTo>
-                <a:lnTo>
-                  <a:pt x="2544429" y="28082"/>
-                </a:lnTo>
-                <a:lnTo>
-                  <a:pt x="2564977" y="58560"/>
-                </a:lnTo>
-                <a:lnTo>
-                  <a:pt x="2572511" y="95885"/>
-                </a:lnTo>
-                <a:lnTo>
-                  <a:pt x="2572511" y="498475"/>
-                </a:lnTo>
-                <a:lnTo>
-                  <a:pt x="2564977" y="535799"/>
-                </a:lnTo>
-                <a:lnTo>
-                  <a:pt x="2544429" y="566277"/>
-                </a:lnTo>
-                <a:lnTo>
-                  <a:pt x="2513951" y="586825"/>
-                </a:lnTo>
-                <a:lnTo>
-                  <a:pt x="2476627" y="594360"/>
-                </a:lnTo>
-                <a:lnTo>
-                  <a:pt x="95885" y="594360"/>
-                </a:lnTo>
-                <a:lnTo>
-                  <a:pt x="58560" y="586825"/>
-                </a:lnTo>
-                <a:lnTo>
-                  <a:pt x="28082" y="566277"/>
-                </a:lnTo>
-                <a:lnTo>
-                  <a:pt x="7534" y="535799"/>
-                </a:lnTo>
-                <a:lnTo>
-                  <a:pt x="0" y="498475"/>
-                </a:lnTo>
-                <a:lnTo>
-                  <a:pt x="0" y="95885"/>
-                </a:lnTo>
-                <a:close/>
-              </a:path>
-            </a:pathLst>
-          </a:custGeom>
-          <a:ln w="12700">
-            <a:solidFill>
-              <a:srgbClr val="808080"/>
-            </a:solidFill>
-          </a:ln>
-        </p:spPr>
-        <p:txBody>
-          <a:bodyPr wrap="square" lIns="0" tIns="0" rIns="0" bIns="0" rtlCol="0"/>
-          <a:lstStyle/>
-          <a:p>
-            <a:endParaRPr/>
-          </a:p>
-        </p:txBody>
-      </p:sp>
-      <p:sp>
-        <p:nvSpPr>
-          <p:cNvPr id="53" name="object 53"/>
-          <p:cNvSpPr txBox="1"/>
-          <p:nvPr/>
-        </p:nvSpPr>
-        <p:spPr>
-          <a:xfrm>
-            <a:off x="3560951" y="4934089"/>
-            <a:ext cx="1729872" cy="455295"/>
-          </a:xfrm>
-          <a:prstGeom prst="rect">
-            <a:avLst/>
-          </a:prstGeom>
-        </p:spPr>
-        <p:txBody>
-          <a:bodyPr vert="horz" wrap="square" lIns="0" tIns="85725" rIns="0" bIns="0" rtlCol="0">
-            <a:spAutoFit/>
-          </a:bodyPr>
-          <a:lstStyle/>
-          <a:p>
-            <a:pPr marL="12700">
-              <a:lnSpc>
-                <a:spcPct val="100000"/>
-              </a:lnSpc>
-              <a:spcBef>
-                <a:spcPts val="675"/>
-              </a:spcBef>
-            </a:pPr>
-            <a:r>
-              <a:rPr sz="1000" b="1" dirty="0">
-                <a:solidFill>
-                  <a:srgbClr val="FFFFFF"/>
-                </a:solidFill>
-                <a:latin typeface="Gulim"/>
-                <a:cs typeface="Gulim"/>
-              </a:rPr>
-              <a:t>000000000042</a:t>
-            </a:r>
-            <a:r>
-              <a:rPr sz="1000" b="1" spc="-75" dirty="0">
-                <a:solidFill>
-                  <a:srgbClr val="FFFFFF"/>
-                </a:solidFill>
-                <a:latin typeface="Gulim"/>
-                <a:cs typeface="Gulim"/>
-              </a:rPr>
-              <a:t> </a:t>
-            </a:r>
-            <a:r>
-              <a:rPr sz="1000" b="1" spc="-20" dirty="0">
-                <a:solidFill>
-                  <a:srgbClr val="FFFFFF"/>
-                </a:solidFill>
-                <a:latin typeface="Gulim"/>
-                <a:cs typeface="Gulim"/>
-              </a:rPr>
-              <a:t>(12자)</a:t>
-            </a:r>
-            <a:endParaRPr sz="1000">
-              <a:latin typeface="Gulim"/>
-              <a:cs typeface="Gulim"/>
-            </a:endParaRPr>
-          </a:p>
-          <a:p>
-            <a:pPr marL="12700">
-              <a:lnSpc>
-                <a:spcPct val="100000"/>
-              </a:lnSpc>
-              <a:spcBef>
-                <a:spcPts val="525"/>
-              </a:spcBef>
-            </a:pPr>
-            <a:r>
-              <a:rPr sz="900" dirty="0">
-                <a:solidFill>
-                  <a:srgbClr val="C0C0C0"/>
-                </a:solidFill>
-                <a:latin typeface="Gulim"/>
-                <a:cs typeface="Gulim"/>
-              </a:rPr>
-              <a:t>해당 시스템의 난수 사용 </a:t>
-            </a:r>
-            <a:r>
-              <a:rPr sz="900" spc="-25" dirty="0">
-                <a:solidFill>
-                  <a:srgbClr val="C0C0C0"/>
-                </a:solidFill>
-                <a:latin typeface="Gulim"/>
-                <a:cs typeface="Gulim"/>
-              </a:rPr>
-              <a:t>누적량</a:t>
-            </a:r>
-            <a:endParaRPr sz="900">
-              <a:latin typeface="Gulim"/>
-              <a:cs typeface="Gulim"/>
-            </a:endParaRPr>
-          </a:p>
-        </p:txBody>
-      </p:sp>
-      <p:grpSp>
-        <p:nvGrpSpPr>
-          <p:cNvPr id="54" name="object 54"/>
-          <p:cNvGrpSpPr/>
-          <p:nvPr/>
-        </p:nvGrpSpPr>
-        <p:grpSpPr>
-          <a:xfrm>
-            <a:off x="407922" y="1605024"/>
-            <a:ext cx="6069077" cy="1133475"/>
-            <a:chOff x="1225550" y="1603502"/>
-            <a:chExt cx="5836920" cy="1133475"/>
-          </a:xfrm>
-        </p:grpSpPr>
-        <p:sp>
-          <p:nvSpPr>
-            <p:cNvPr id="55" name="object 55"/>
-            <p:cNvSpPr/>
-            <p:nvPr/>
-          </p:nvSpPr>
-          <p:spPr>
-            <a:xfrm>
-              <a:off x="1238250" y="1616202"/>
-              <a:ext cx="5811520" cy="1108075"/>
-            </a:xfrm>
-            <a:custGeom>
-              <a:avLst/>
-              <a:gdLst/>
-              <a:ahLst/>
-              <a:cxnLst/>
-              <a:rect l="l" t="t" r="r" b="b"/>
-              <a:pathLst>
-                <a:path w="5811520" h="1108075">
-                  <a:moveTo>
-                    <a:pt x="5811011" y="0"/>
-                  </a:moveTo>
-                  <a:lnTo>
-                    <a:pt x="0" y="0"/>
-                  </a:lnTo>
-                  <a:lnTo>
-                    <a:pt x="0" y="1107948"/>
-                  </a:lnTo>
-                  <a:lnTo>
-                    <a:pt x="5811011" y="1107948"/>
-                  </a:lnTo>
-                  <a:lnTo>
-                    <a:pt x="5811011" y="0"/>
-                  </a:lnTo>
-                  <a:close/>
-                </a:path>
-              </a:pathLst>
-            </a:custGeom>
-            <a:solidFill>
-              <a:srgbClr val="1E1E1E"/>
-            </a:solidFill>
-          </p:spPr>
-          <p:txBody>
-            <a:bodyPr wrap="square" lIns="0" tIns="0" rIns="0" bIns="0" rtlCol="0"/>
-            <a:lstStyle/>
-            <a:p>
-              <a:endParaRPr/>
-            </a:p>
-          </p:txBody>
-        </p:sp>
-        <p:sp>
-          <p:nvSpPr>
-            <p:cNvPr id="56" name="object 56"/>
-            <p:cNvSpPr/>
-            <p:nvPr/>
-          </p:nvSpPr>
-          <p:spPr>
-            <a:xfrm>
-              <a:off x="1238250" y="1616202"/>
-              <a:ext cx="5811520" cy="1108075"/>
-            </a:xfrm>
-            <a:custGeom>
-              <a:avLst/>
-              <a:gdLst/>
-              <a:ahLst/>
-              <a:cxnLst/>
-              <a:rect l="l" t="t" r="r" b="b"/>
-              <a:pathLst>
-                <a:path w="5811520" h="1108075">
-                  <a:moveTo>
-                    <a:pt x="0" y="1107948"/>
-                  </a:moveTo>
-                  <a:lnTo>
-                    <a:pt x="5811011" y="1107948"/>
-                  </a:lnTo>
-                  <a:lnTo>
-                    <a:pt x="5811011" y="0"/>
-                  </a:lnTo>
-                  <a:lnTo>
-                    <a:pt x="0" y="0"/>
-                  </a:lnTo>
-                  <a:lnTo>
-                    <a:pt x="0" y="1107948"/>
-                  </a:lnTo>
-                  <a:close/>
-                </a:path>
-              </a:pathLst>
-            </a:custGeom>
-            <a:ln w="25400">
-              <a:solidFill>
-                <a:srgbClr val="C0C0C0"/>
-              </a:solidFill>
-            </a:ln>
-          </p:spPr>
-          <p:txBody>
-            <a:bodyPr wrap="square" lIns="0" tIns="0" rIns="0" bIns="0" rtlCol="0"/>
-            <a:lstStyle/>
-            <a:p>
-              <a:endParaRPr/>
-            </a:p>
-          </p:txBody>
-        </p:sp>
-      </p:grpSp>
-      <p:sp>
-        <p:nvSpPr>
-          <p:cNvPr id="57" name="object 57"/>
-          <p:cNvSpPr txBox="1"/>
-          <p:nvPr/>
-        </p:nvSpPr>
-        <p:spPr>
-          <a:xfrm>
-            <a:off x="582674" y="1733801"/>
-            <a:ext cx="85833" cy="166071"/>
-          </a:xfrm>
-          <a:prstGeom prst="rect">
-            <a:avLst/>
-          </a:prstGeom>
-        </p:spPr>
-        <p:txBody>
-          <a:bodyPr vert="horz" wrap="square" lIns="0" tIns="12065" rIns="0" bIns="0" rtlCol="0">
-            <a:spAutoFit/>
-          </a:bodyPr>
-          <a:lstStyle/>
-          <a:p>
-            <a:pPr>
-              <a:lnSpc>
-                <a:spcPct val="100000"/>
-              </a:lnSpc>
-              <a:spcBef>
-                <a:spcPts val="95"/>
-              </a:spcBef>
-            </a:pPr>
-            <a:r>
-              <a:rPr sz="1000" spc="-50" dirty="0">
-                <a:solidFill>
-                  <a:srgbClr val="FFD600"/>
-                </a:solidFill>
-                <a:latin typeface="Consolas"/>
-                <a:cs typeface="Consolas"/>
-              </a:rPr>
-              <a:t>{</a:t>
-            </a:r>
-            <a:endParaRPr sz="1000">
-              <a:latin typeface="Consolas"/>
-              <a:cs typeface="Consolas"/>
-            </a:endParaRPr>
-          </a:p>
-        </p:txBody>
-      </p:sp>
-      <p:sp>
-        <p:nvSpPr>
-          <p:cNvPr id="61" name="object 61"/>
-          <p:cNvSpPr txBox="1">
-            <a:spLocks noGrp="1"/>
-          </p:cNvSpPr>
-          <p:nvPr>
-            <p:ph type="ftr" sz="quarter" idx="5"/>
-          </p:nvPr>
-        </p:nvSpPr>
-        <p:spPr>
-          <a:prstGeom prst="rect">
-            <a:avLst/>
-          </a:prstGeom>
-        </p:spPr>
-        <p:txBody>
-          <a:bodyPr vert="horz" wrap="square" lIns="0" tIns="23495" rIns="0" bIns="0" rtlCol="0">
-            <a:spAutoFit/>
-          </a:bodyPr>
-          <a:lstStyle/>
-          <a:p>
-            <a:pPr marL="12700">
-              <a:lnSpc>
-                <a:spcPct val="100000"/>
-              </a:lnSpc>
-              <a:spcBef>
-                <a:spcPts val="185"/>
-              </a:spcBef>
-            </a:pPr>
-            <a:r>
-              <a:rPr spc="-25" dirty="0"/>
-              <a:t>시작</a:t>
-            </a:r>
-          </a:p>
-        </p:txBody>
-      </p:sp>
-      <p:sp>
-        <p:nvSpPr>
-          <p:cNvPr id="62" name="object 62"/>
-          <p:cNvSpPr txBox="1"/>
-          <p:nvPr/>
-        </p:nvSpPr>
-        <p:spPr>
-          <a:xfrm>
-            <a:off x="1225702" y="6571850"/>
-            <a:ext cx="1062990" cy="161583"/>
-          </a:xfrm>
-          <a:prstGeom prst="rect">
-            <a:avLst/>
-          </a:prstGeom>
-        </p:spPr>
-        <p:txBody>
-          <a:bodyPr vert="horz" wrap="square" lIns="0" tIns="22860" rIns="0" bIns="0" rtlCol="0">
-            <a:spAutoFit/>
-          </a:bodyPr>
-          <a:lstStyle/>
-          <a:p>
-            <a:pPr marL="12700">
-              <a:lnSpc>
-                <a:spcPct val="100000"/>
-              </a:lnSpc>
-              <a:spcBef>
-                <a:spcPts val="180"/>
-              </a:spcBef>
-            </a:pPr>
-            <a:r>
-              <a:rPr lang="en-US" altLang="ko-KR" sz="900" b="1" dirty="0">
-                <a:solidFill>
-                  <a:schemeClr val="tx1"/>
-                </a:solidFill>
-                <a:latin typeface="Calibri"/>
-                <a:cs typeface="Calibri"/>
-              </a:rPr>
-              <a:t>World</a:t>
-            </a:r>
-            <a:r>
-              <a:rPr lang="en-US" altLang="ko-KR" sz="900" b="1" spc="-35" dirty="0">
-                <a:solidFill>
-                  <a:schemeClr val="tx1"/>
-                </a:solidFill>
-                <a:latin typeface="Calibri"/>
-                <a:cs typeface="Calibri"/>
-              </a:rPr>
-              <a:t> </a:t>
-            </a:r>
-            <a:r>
-              <a:rPr lang="en-US" altLang="ko-KR" sz="900" b="1" dirty="0">
-                <a:solidFill>
-                  <a:schemeClr val="tx1"/>
-                </a:solidFill>
-                <a:latin typeface="Calibri"/>
-                <a:cs typeface="Calibri"/>
-              </a:rPr>
-              <a:t>First</a:t>
-            </a:r>
-            <a:r>
-              <a:rPr lang="en-US" altLang="ko-KR" sz="900" b="1" spc="-20" dirty="0">
-                <a:solidFill>
-                  <a:schemeClr val="tx1"/>
-                </a:solidFill>
-                <a:latin typeface="Calibri"/>
-                <a:cs typeface="Calibri"/>
-              </a:rPr>
-              <a:t> </a:t>
-            </a:r>
-            <a:r>
-              <a:rPr lang="en-US" altLang="ko-KR" sz="900" b="1" spc="-10" dirty="0">
-                <a:solidFill>
-                  <a:schemeClr val="tx1"/>
-                </a:solidFill>
-                <a:latin typeface="Calibri"/>
-                <a:cs typeface="Calibri"/>
-              </a:rPr>
-              <a:t>Kill</a:t>
-            </a:r>
-            <a:r>
-              <a:rPr lang="en-US" altLang="ko-KR" sz="900" b="1" spc="-10" dirty="0">
-                <a:solidFill>
-                  <a:schemeClr val="tx1"/>
-                </a:solidFill>
-                <a:latin typeface="Arial"/>
-                <a:cs typeface="Arial"/>
-              </a:rPr>
-              <a:t>.exe</a:t>
-            </a:r>
-            <a:endParaRPr lang="en-US" altLang="ko-KR" sz="900" dirty="0">
-              <a:solidFill>
-                <a:schemeClr val="tx1"/>
-              </a:solidFill>
-              <a:latin typeface="Arial"/>
-              <a:cs typeface="Arial"/>
-            </a:endParaRPr>
-          </a:p>
-        </p:txBody>
-      </p:sp>
-      <p:sp>
-        <p:nvSpPr>
-          <p:cNvPr id="58" name="object 58"/>
-          <p:cNvSpPr txBox="1"/>
-          <p:nvPr/>
-        </p:nvSpPr>
-        <p:spPr>
-          <a:xfrm>
-            <a:off x="772793" y="1885211"/>
-            <a:ext cx="3426731" cy="564515"/>
-          </a:xfrm>
-          <a:prstGeom prst="rect">
-            <a:avLst/>
-          </a:prstGeom>
-        </p:spPr>
-        <p:txBody>
-          <a:bodyPr vert="horz" wrap="square" lIns="0" tIns="40005" rIns="0" bIns="0" rtlCol="0">
-            <a:spAutoFit/>
-          </a:bodyPr>
-          <a:lstStyle/>
-          <a:p>
-            <a:pPr>
-              <a:lnSpc>
-                <a:spcPct val="100000"/>
-              </a:lnSpc>
-              <a:spcBef>
-                <a:spcPts val="315"/>
-              </a:spcBef>
-            </a:pPr>
-            <a:r>
-              <a:rPr sz="1000" dirty="0">
-                <a:solidFill>
-                  <a:srgbClr val="97FA97"/>
-                </a:solidFill>
-                <a:latin typeface="Consolas"/>
-                <a:cs typeface="Consolas"/>
-              </a:rPr>
-              <a:t>"baseSeed"</a:t>
-            </a:r>
-            <a:r>
-              <a:rPr sz="1000" dirty="0">
-                <a:solidFill>
-                  <a:srgbClr val="FFFFFF"/>
-                </a:solidFill>
-                <a:latin typeface="Consolas"/>
-                <a:cs typeface="Consolas"/>
-              </a:rPr>
-              <a:t>:</a:t>
-            </a:r>
-            <a:r>
-              <a:rPr sz="1000" spc="-70" dirty="0">
-                <a:solidFill>
-                  <a:srgbClr val="FFFFFF"/>
-                </a:solidFill>
-                <a:latin typeface="Consolas"/>
-                <a:cs typeface="Consolas"/>
-              </a:rPr>
-              <a:t> </a:t>
-            </a:r>
-            <a:r>
-              <a:rPr sz="1000" spc="-10" dirty="0">
-                <a:solidFill>
-                  <a:srgbClr val="FF8B00"/>
-                </a:solidFill>
-                <a:latin typeface="Consolas"/>
-                <a:cs typeface="Consolas"/>
-              </a:rPr>
-              <a:t>1826533749</a:t>
-            </a:r>
-            <a:r>
-              <a:rPr sz="1000" spc="-10" dirty="0">
-                <a:solidFill>
-                  <a:srgbClr val="97FA97"/>
-                </a:solidFill>
-                <a:latin typeface="Consolas"/>
-                <a:cs typeface="Consolas"/>
-              </a:rPr>
-              <a:t>,</a:t>
-            </a:r>
-            <a:endParaRPr sz="1000" dirty="0">
-              <a:latin typeface="Consolas"/>
-              <a:cs typeface="Consolas"/>
-            </a:endParaRPr>
-          </a:p>
-          <a:p>
-            <a:pPr>
-              <a:lnSpc>
-                <a:spcPct val="100000"/>
-              </a:lnSpc>
-              <a:spcBef>
-                <a:spcPts val="210"/>
-              </a:spcBef>
-            </a:pPr>
-            <a:r>
-              <a:rPr sz="1000" dirty="0">
-                <a:solidFill>
-                  <a:srgbClr val="97FA97"/>
-                </a:solidFill>
-                <a:latin typeface="Consolas"/>
-                <a:cs typeface="Consolas"/>
-              </a:rPr>
-              <a:t>"seedToken"</a:t>
-            </a:r>
-            <a:r>
-              <a:rPr sz="1000" dirty="0">
-                <a:solidFill>
-                  <a:srgbClr val="FFFFFF"/>
-                </a:solidFill>
-                <a:latin typeface="Consolas"/>
-                <a:cs typeface="Consolas"/>
-              </a:rPr>
-              <a:t>:</a:t>
-            </a:r>
-            <a:r>
-              <a:rPr sz="1000" spc="-75" dirty="0">
-                <a:solidFill>
-                  <a:srgbClr val="FFFFFF"/>
-                </a:solidFill>
-                <a:latin typeface="Consolas"/>
-                <a:cs typeface="Consolas"/>
-              </a:rPr>
-              <a:t> </a:t>
-            </a:r>
-            <a:r>
-              <a:rPr sz="1000" spc="-10" dirty="0">
-                <a:solidFill>
-                  <a:srgbClr val="FFB6C1"/>
-                </a:solidFill>
-                <a:latin typeface="Consolas"/>
-                <a:cs typeface="Consolas"/>
-              </a:rPr>
-              <a:t>"0000000000182653374901400100..."</a:t>
-            </a:r>
-            <a:r>
-              <a:rPr sz="1000" spc="-10" dirty="0">
-                <a:solidFill>
-                  <a:srgbClr val="97FA97"/>
-                </a:solidFill>
-                <a:latin typeface="Consolas"/>
-                <a:cs typeface="Consolas"/>
-              </a:rPr>
-              <a:t>,</a:t>
-            </a:r>
-            <a:endParaRPr sz="1000" dirty="0">
-              <a:latin typeface="Consolas"/>
-              <a:cs typeface="Consolas"/>
-            </a:endParaRPr>
-          </a:p>
-          <a:p>
-            <a:pPr>
-              <a:lnSpc>
-                <a:spcPct val="100000"/>
-              </a:lnSpc>
-              <a:spcBef>
-                <a:spcPts val="215"/>
-              </a:spcBef>
-            </a:pPr>
-            <a:r>
-              <a:rPr sz="1000" dirty="0">
-                <a:solidFill>
-                  <a:srgbClr val="97FA97"/>
-                </a:solidFill>
-                <a:latin typeface="Consolas"/>
-                <a:cs typeface="Consolas"/>
-              </a:rPr>
-              <a:t>"updatedAt"</a:t>
-            </a:r>
-            <a:r>
-              <a:rPr sz="1000" dirty="0">
-                <a:solidFill>
-                  <a:srgbClr val="FFFFFF"/>
-                </a:solidFill>
-                <a:latin typeface="Consolas"/>
-                <a:cs typeface="Consolas"/>
-              </a:rPr>
-              <a:t>:</a:t>
-            </a:r>
-            <a:r>
-              <a:rPr sz="1000" spc="-20" dirty="0">
-                <a:solidFill>
-                  <a:srgbClr val="FFFFFF"/>
-                </a:solidFill>
-                <a:latin typeface="Consolas"/>
-                <a:cs typeface="Consolas"/>
-              </a:rPr>
-              <a:t> </a:t>
-            </a:r>
-            <a:r>
-              <a:rPr sz="1000" spc="-10" dirty="0">
-                <a:solidFill>
-                  <a:srgbClr val="FFB6C1"/>
-                </a:solidFill>
-                <a:latin typeface="Consolas"/>
-                <a:cs typeface="Consolas"/>
-              </a:rPr>
-              <a:t>"2026-</a:t>
-            </a:r>
-            <a:r>
-              <a:rPr sz="1000" spc="-20" dirty="0">
-                <a:solidFill>
-                  <a:srgbClr val="FFB6C1"/>
-                </a:solidFill>
-                <a:latin typeface="Consolas"/>
-                <a:cs typeface="Consolas"/>
-              </a:rPr>
-              <a:t>05-</a:t>
-            </a:r>
-            <a:r>
-              <a:rPr sz="1000" dirty="0">
-                <a:solidFill>
-                  <a:srgbClr val="FFB6C1"/>
-                </a:solidFill>
-                <a:latin typeface="Consolas"/>
-                <a:cs typeface="Consolas"/>
-              </a:rPr>
-              <a:t>19</a:t>
-            </a:r>
-            <a:r>
-              <a:rPr sz="1000" spc="-15" dirty="0">
-                <a:solidFill>
-                  <a:srgbClr val="FFB6C1"/>
-                </a:solidFill>
-                <a:latin typeface="Consolas"/>
-                <a:cs typeface="Consolas"/>
-              </a:rPr>
-              <a:t> </a:t>
-            </a:r>
-            <a:r>
-              <a:rPr sz="1000" spc="-10" dirty="0">
-                <a:solidFill>
-                  <a:srgbClr val="FFB6C1"/>
-                </a:solidFill>
-                <a:latin typeface="Consolas"/>
-                <a:cs typeface="Consolas"/>
-              </a:rPr>
-              <a:t>21:20:54"</a:t>
-            </a:r>
-            <a:endParaRPr sz="1000" dirty="0">
-              <a:latin typeface="Consolas"/>
-              <a:cs typeface="Consolas"/>
-            </a:endParaRPr>
-          </a:p>
-        </p:txBody>
-      </p:sp>
-      <p:sp>
-        <p:nvSpPr>
-          <p:cNvPr id="59" name="object 59"/>
-          <p:cNvSpPr txBox="1"/>
-          <p:nvPr/>
-        </p:nvSpPr>
-        <p:spPr>
-          <a:xfrm>
-            <a:off x="1400301" y="2449194"/>
-            <a:ext cx="85833" cy="166071"/>
-          </a:xfrm>
-          <a:prstGeom prst="rect">
-            <a:avLst/>
-          </a:prstGeom>
-        </p:spPr>
-        <p:txBody>
-          <a:bodyPr vert="horz" wrap="square" lIns="0" tIns="12065" rIns="0" bIns="0" rtlCol="0">
-            <a:spAutoFit/>
-          </a:bodyPr>
-          <a:lstStyle/>
-          <a:p>
-            <a:pPr>
-              <a:lnSpc>
-                <a:spcPct val="100000"/>
-              </a:lnSpc>
-              <a:spcBef>
-                <a:spcPts val="95"/>
-              </a:spcBef>
-            </a:pPr>
-            <a:r>
-              <a:rPr sz="1000" spc="-50" dirty="0">
-                <a:solidFill>
-                  <a:srgbClr val="FFD600"/>
-                </a:solidFill>
-                <a:latin typeface="Consolas"/>
-                <a:cs typeface="Consolas"/>
-              </a:rPr>
-              <a:t>}</a:t>
-            </a:r>
-            <a:endParaRPr sz="1000">
-              <a:latin typeface="Consolas"/>
-              <a:cs typeface="Consolas"/>
-            </a:endParaRPr>
-          </a:p>
-        </p:txBody>
-      </p:sp>
-      <p:sp>
-        <p:nvSpPr>
-          <p:cNvPr id="60" name="object 60"/>
-          <p:cNvSpPr txBox="1"/>
-          <p:nvPr/>
-        </p:nvSpPr>
-        <p:spPr>
-          <a:xfrm>
-            <a:off x="8185661" y="1108746"/>
-            <a:ext cx="1981200" cy="401320"/>
-          </a:xfrm>
-          <a:prstGeom prst="rect">
-            <a:avLst/>
-          </a:prstGeom>
-          <a:solidFill>
-            <a:srgbClr val="C0C0C0"/>
-          </a:solidFill>
-          <a:ln w="25400">
-            <a:solidFill>
-              <a:srgbClr val="FFFFFF"/>
-            </a:solidFill>
-          </a:ln>
-        </p:spPr>
-        <p:txBody>
-          <a:bodyPr vert="horz" wrap="square" lIns="0" tIns="82550" rIns="0" bIns="0" rtlCol="0">
-            <a:spAutoFit/>
-          </a:bodyPr>
-          <a:lstStyle/>
-          <a:p>
-            <a:pPr marL="648970">
-              <a:lnSpc>
-                <a:spcPct val="100000"/>
-              </a:lnSpc>
-              <a:spcBef>
-                <a:spcPts val="650"/>
-              </a:spcBef>
-            </a:pPr>
-            <a:r>
-              <a:rPr sz="1200" b="1" dirty="0">
-                <a:latin typeface="Gulim"/>
-                <a:cs typeface="Gulim"/>
-              </a:rPr>
-              <a:t>결과</a:t>
-            </a:r>
-            <a:r>
-              <a:rPr sz="1200" b="1" spc="-15" dirty="0">
-                <a:latin typeface="Gulim"/>
-                <a:cs typeface="Gulim"/>
-              </a:rPr>
-              <a:t> </a:t>
-            </a:r>
-            <a:r>
-              <a:rPr sz="1200" b="1" spc="-25" dirty="0">
-                <a:latin typeface="Gulim"/>
-                <a:cs typeface="Gulim"/>
-              </a:rPr>
-              <a:t>요약</a:t>
-            </a:r>
-            <a:endParaRPr sz="1200" dirty="0">
-              <a:latin typeface="Gulim"/>
-              <a:cs typeface="Gulim"/>
-            </a:endParaRPr>
-          </a:p>
-        </p:txBody>
-      </p:sp>
-    </p:spTree>
-  </p:cSld>
-  <p:clrMapOvr>
-    <a:masterClrMapping/>
-  </p:clrMapOvr>
-</p:sld>
-</file>
-
-<file path=ppt/slides/slide14.xml><?xml version="1.0" encoding="utf-8"?>
 <p:sld xmlns:a="http://schemas.openxmlformats.org/drawingml/2006/main" xmlns:r="http://schemas.openxmlformats.org/officeDocument/2006/relationships" xmlns:p="http://schemas.openxmlformats.org/presentationml/2006/main">
   <p:cSld>
     <p:spTree>
@@ -23110,7 +17906,7 @@
 </p:sld>
 </file>
 
-<file path=ppt/slides/slide15.xml><?xml version="1.0" encoding="utf-8"?>
+<file path=ppt/slides/slide14.xml><?xml version="1.0" encoding="utf-8"?>
 <p:sld xmlns:a="http://schemas.openxmlformats.org/drawingml/2006/main" xmlns:r="http://schemas.openxmlformats.org/officeDocument/2006/relationships" xmlns:p="http://schemas.openxmlformats.org/presentationml/2006/main">
   <p:cSld>
     <p:spTree>
